--- a/public/lessons/year-6-maths/spring/week-17/solve-percentage-change-problems/teaching-powerpoint-v1.pptx
+++ b/public/lessons/year-6-maths/spring/week-17/solve-percentage-change-problems/teaching-powerpoint-v1.pptx
@@ -2,24 +2,24 @@
 <file path=ppt/presentation.xml><?xml version="1.0" encoding="utf-8"?>
 <p:presentation xmlns:p="http://schemas.openxmlformats.org/presentationml/2006/main">
   <p:sldMasterIdLst>
-    <p:sldMasterId xmlns:r="http://schemas.openxmlformats.org/officeDocument/2006/relationships" id="2147483648" r:id="Rf98b255a24fd438d"/>
+    <p:sldMasterId xmlns:r="http://schemas.openxmlformats.org/officeDocument/2006/relationships" id="2147483648" r:id="R996e569da2424132"/>
   </p:sldMasterIdLst>
   <p:notesMasterIdLst>
-    <p:notesMasterId xmlns:r="http://schemas.openxmlformats.org/officeDocument/2006/relationships" r:id="R3d22ede4a4004877"/>
+    <p:notesMasterId xmlns:r="http://schemas.openxmlformats.org/officeDocument/2006/relationships" r:id="Rb6173ba54a964c25"/>
   </p:notesMasterIdLst>
   <p:sldIdLst>
-    <p:sldId xmlns:r="http://schemas.openxmlformats.org/officeDocument/2006/relationships" id="256" r:id="R33506cfae4e148f7"/>
-    <p:sldId xmlns:r="http://schemas.openxmlformats.org/officeDocument/2006/relationships" id="257" r:id="Recd12586f07f4745"/>
-    <p:sldId xmlns:r="http://schemas.openxmlformats.org/officeDocument/2006/relationships" id="258" r:id="R18bb0ffc996c4e5b"/>
-    <p:sldId xmlns:r="http://schemas.openxmlformats.org/officeDocument/2006/relationships" id="259" r:id="Rd433bf1029d2416d"/>
-    <p:sldId xmlns:r="http://schemas.openxmlformats.org/officeDocument/2006/relationships" id="260" r:id="Re4c4c1101a134952"/>
-    <p:sldId xmlns:r="http://schemas.openxmlformats.org/officeDocument/2006/relationships" id="261" r:id="R5e2fbc1faa554eb9"/>
-    <p:sldId xmlns:r="http://schemas.openxmlformats.org/officeDocument/2006/relationships" id="262" r:id="R3cb91a449af644e5"/>
-    <p:sldId xmlns:r="http://schemas.openxmlformats.org/officeDocument/2006/relationships" id="263" r:id="R8d2fb93d522c4d09"/>
-    <p:sldId xmlns:r="http://schemas.openxmlformats.org/officeDocument/2006/relationships" id="264" r:id="Rf8c74fac4b6a43b7"/>
-    <p:sldId xmlns:r="http://schemas.openxmlformats.org/officeDocument/2006/relationships" id="265" r:id="R769c14517e2b40a1"/>
-    <p:sldId xmlns:r="http://schemas.openxmlformats.org/officeDocument/2006/relationships" id="266" r:id="R8e2c960a18a74736"/>
-    <p:sldId xmlns:r="http://schemas.openxmlformats.org/officeDocument/2006/relationships" id="267" r:id="Rfb173896532b4ae8"/>
+    <p:sldId xmlns:r="http://schemas.openxmlformats.org/officeDocument/2006/relationships" id="256" r:id="Ref9f4c5f3b0d44cc"/>
+    <p:sldId xmlns:r="http://schemas.openxmlformats.org/officeDocument/2006/relationships" id="257" r:id="R29b81b47fd5e41c5"/>
+    <p:sldId xmlns:r="http://schemas.openxmlformats.org/officeDocument/2006/relationships" id="258" r:id="R58062d07b97b44e5"/>
+    <p:sldId xmlns:r="http://schemas.openxmlformats.org/officeDocument/2006/relationships" id="259" r:id="Rfbdb69bc78b943e3"/>
+    <p:sldId xmlns:r="http://schemas.openxmlformats.org/officeDocument/2006/relationships" id="260" r:id="R30bcc9b61595429e"/>
+    <p:sldId xmlns:r="http://schemas.openxmlformats.org/officeDocument/2006/relationships" id="261" r:id="R3d55676c390b41ec"/>
+    <p:sldId xmlns:r="http://schemas.openxmlformats.org/officeDocument/2006/relationships" id="262" r:id="Rdb9a03e57edc4627"/>
+    <p:sldId xmlns:r="http://schemas.openxmlformats.org/officeDocument/2006/relationships" id="263" r:id="R1ecec182920a4eeb"/>
+    <p:sldId xmlns:r="http://schemas.openxmlformats.org/officeDocument/2006/relationships" id="264" r:id="R6bf46031acc84523"/>
+    <p:sldId xmlns:r="http://schemas.openxmlformats.org/officeDocument/2006/relationships" id="265" r:id="R18a491181ebf49b7"/>
+    <p:sldId xmlns:r="http://schemas.openxmlformats.org/officeDocument/2006/relationships" id="266" r:id="R9b8ef2309723498f"/>
+    <p:sldId xmlns:r="http://schemas.openxmlformats.org/officeDocument/2006/relationships" id="267" r:id="Rf3f9ad8a399c45cb"/>
   </p:sldIdLst>
   <p:sldSz cx="12192000" cy="6858000"/>
   <p:notesSz cx="6858000" cy="9144000"/>
@@ -873,7 +873,7 @@
           <a:lstStyle xmlns:a="http://schemas.openxmlformats.org/drawingml/2006/main"/>
           <a:p xmlns:a="http://schemas.openxmlformats.org/drawingml/2006/main">
             <a:r>
-              <a:t>I do. Reveal the question, setup and each calculation stage one click at a time. Pupils watch before copying. Model answer: £204.</a:t>
+              <a:t>I do. Reveal the question, then reveal each mathematical change one click at a time. Point to the numbers and operation that changed before moving to the next line. Final answer: £204.</a:t>
             </a:r>
           </a:p>
         </p:txBody>
@@ -1291,7 +1291,7 @@
   </p:cSld>
   <p:clrMap bg1="lt1" tx1="dk1" bg2="lt2" tx2="dk2" accent1="accent1" accent2="accent2" accent3="accent3" accent4="accent4" accent5="accent5" accent6="accent6" hlink="hlink" folHlink="folHlink"/>
   <p:sldLayoutIdLst>
-    <p:sldLayoutId xmlns:r="http://schemas.openxmlformats.org/officeDocument/2006/relationships" id="2147483649" r:id="R02d96d04d8794890"/>
+    <p:sldLayoutId xmlns:r="http://schemas.openxmlformats.org/officeDocument/2006/relationships" id="2147483649" r:id="R4dfc9bf4346c4a6f"/>
   </p:sldLayoutIdLst>
   <p:txStyles>
     <p:titleStyle>
@@ -1842,7 +1842,7 @@
           <p:cNvPr id="12" name="">
             <a:extLst xmlns:a="http://schemas.openxmlformats.org/drawingml/2006/main">
               <a:ext uri="{FF2B5EF4-FFF2-40B4-BE49-F238E27FC236}">
-                <a16:creationId xmlns:a16="http://schemas.microsoft.com/office/drawing/2014/main" id="{712F9F65-2D11-481B-9330-1F9E9C355B2B}"/>
+                <a16:creationId xmlns:a16="http://schemas.microsoft.com/office/drawing/2014/main" id="{34A40889-A61A-4643-809F-F16CFB1B3F7E}"/>
               </a:ext>
             </a:extLst>
           </p:cNvPr>
@@ -1874,7 +1874,7 @@
           <p:cNvPr id="2" name="">
             <a:extLst xmlns:a="http://schemas.openxmlformats.org/drawingml/2006/main">
               <a:ext uri="{FF2B5EF4-FFF2-40B4-BE49-F238E27FC236}">
-                <a16:creationId xmlns:a16="http://schemas.microsoft.com/office/drawing/2014/main" id="{12EAC43F-1EE1-489D-9D6B-4F93FC3076AB}"/>
+                <a16:creationId xmlns:a16="http://schemas.microsoft.com/office/drawing/2014/main" id="{411E1B39-D04A-474E-9974-33E30C1EF137}"/>
               </a:ext>
             </a:extLst>
           </p:cNvPr>
@@ -1931,7 +1931,7 @@
           <p:cNvPr id="3" name="">
             <a:extLst xmlns:a="http://schemas.openxmlformats.org/drawingml/2006/main">
               <a:ext uri="{FF2B5EF4-FFF2-40B4-BE49-F238E27FC236}">
-                <a16:creationId xmlns:a16="http://schemas.microsoft.com/office/drawing/2014/main" id="{AA28217D-8B3C-4F43-BB8B-5AE44B2E23D4}"/>
+                <a16:creationId xmlns:a16="http://schemas.microsoft.com/office/drawing/2014/main" id="{9F7147DC-F52B-460D-98C9-E7F696F740D2}"/>
               </a:ext>
             </a:extLst>
           </p:cNvPr>
@@ -1965,7 +1965,7 @@
           <p:cNvPr id="4" name="">
             <a:extLst xmlns:a="http://schemas.openxmlformats.org/drawingml/2006/main">
               <a:ext uri="{FF2B5EF4-FFF2-40B4-BE49-F238E27FC236}">
-                <a16:creationId xmlns:a16="http://schemas.microsoft.com/office/drawing/2014/main" id="{C655DFAD-0698-49A1-A0BC-5DE3EDA4ECBF}"/>
+                <a16:creationId xmlns:a16="http://schemas.microsoft.com/office/drawing/2014/main" id="{1C6A8EBF-8E74-40DD-8943-6FD874D8C2C7}"/>
               </a:ext>
             </a:extLst>
           </p:cNvPr>
@@ -2022,7 +2022,7 @@
           <p:cNvPr id="5" name="">
             <a:extLst xmlns:a="http://schemas.openxmlformats.org/drawingml/2006/main">
               <a:ext uri="{FF2B5EF4-FFF2-40B4-BE49-F238E27FC236}">
-                <a16:creationId xmlns:a16="http://schemas.microsoft.com/office/drawing/2014/main" id="{62CE7378-F3F8-4C9D-869A-2BB895AAFCDC}"/>
+                <a16:creationId xmlns:a16="http://schemas.microsoft.com/office/drawing/2014/main" id="{E7C34D4A-C8E8-4D20-8BA8-30F060A9D6DA}"/>
               </a:ext>
             </a:extLst>
           </p:cNvPr>
@@ -2079,7 +2079,7 @@
           <p:cNvPr id="6" name="">
             <a:extLst xmlns:a="http://schemas.openxmlformats.org/drawingml/2006/main">
               <a:ext uri="{FF2B5EF4-FFF2-40B4-BE49-F238E27FC236}">
-                <a16:creationId xmlns:a16="http://schemas.microsoft.com/office/drawing/2014/main" id="{B00F9BE2-6EBE-4E00-BB73-8EA0C187ED28}"/>
+                <a16:creationId xmlns:a16="http://schemas.microsoft.com/office/drawing/2014/main" id="{0F9C71E5-3CEB-494C-A328-A00E158E2A44}"/>
               </a:ext>
             </a:extLst>
           </p:cNvPr>
@@ -2113,7 +2113,7 @@
           <p:cNvPr id="7" name="">
             <a:extLst xmlns:a="http://schemas.openxmlformats.org/drawingml/2006/main">
               <a:ext uri="{FF2B5EF4-FFF2-40B4-BE49-F238E27FC236}">
-                <a16:creationId xmlns:a16="http://schemas.microsoft.com/office/drawing/2014/main" id="{BB8860AD-E219-456B-B6CB-110DAD63AA76}"/>
+                <a16:creationId xmlns:a16="http://schemas.microsoft.com/office/drawing/2014/main" id="{928A64B7-D6EF-4A2D-9CB8-B68EDDBF39D1}"/>
               </a:ext>
             </a:extLst>
           </p:cNvPr>
@@ -2170,7 +2170,7 @@
           <p:cNvPr id="8" name="">
             <a:extLst xmlns:a="http://schemas.openxmlformats.org/drawingml/2006/main">
               <a:ext uri="{FF2B5EF4-FFF2-40B4-BE49-F238E27FC236}">
-                <a16:creationId xmlns:a16="http://schemas.microsoft.com/office/drawing/2014/main" id="{562390A8-1ABC-4F52-8748-62FB16402AE1}"/>
+                <a16:creationId xmlns:a16="http://schemas.microsoft.com/office/drawing/2014/main" id="{8AED9FEC-A930-4B1F-95BC-90BA23E8DFC6}"/>
               </a:ext>
             </a:extLst>
           </p:cNvPr>
@@ -2227,7 +2227,7 @@
           <p:cNvPr id="9" name="">
             <a:extLst xmlns:a="http://schemas.openxmlformats.org/drawingml/2006/main">
               <a:ext uri="{FF2B5EF4-FFF2-40B4-BE49-F238E27FC236}">
-                <a16:creationId xmlns:a16="http://schemas.microsoft.com/office/drawing/2014/main" id="{9812F9FC-8AAD-4FF2-96EB-8C85D4E6C681}"/>
+                <a16:creationId xmlns:a16="http://schemas.microsoft.com/office/drawing/2014/main" id="{80E65D90-42F9-4010-80C9-B3C6C0565AAC}"/>
               </a:ext>
             </a:extLst>
           </p:cNvPr>
@@ -2284,7 +2284,7 @@
           <p:cNvPr id="10" name="">
             <a:extLst xmlns:a="http://schemas.openxmlformats.org/drawingml/2006/main">
               <a:ext uri="{FF2B5EF4-FFF2-40B4-BE49-F238E27FC236}">
-                <a16:creationId xmlns:a16="http://schemas.microsoft.com/office/drawing/2014/main" id="{2583A367-6777-469A-9809-D972D3755451}"/>
+                <a16:creationId xmlns:a16="http://schemas.microsoft.com/office/drawing/2014/main" id="{7899CEB0-8AC3-48C8-8B3E-F032A2A4E431}"/>
               </a:ext>
             </a:extLst>
           </p:cNvPr>
@@ -2341,7 +2341,7 @@
           <p:cNvPr id="11" name="">
             <a:extLst xmlns:a="http://schemas.openxmlformats.org/drawingml/2006/main">
               <a:ext uri="{FF2B5EF4-FFF2-40B4-BE49-F238E27FC236}">
-                <a16:creationId xmlns:a16="http://schemas.microsoft.com/office/drawing/2014/main" id="{72A980B9-C516-4E93-B443-92A0B2340BC6}"/>
+                <a16:creationId xmlns:a16="http://schemas.microsoft.com/office/drawing/2014/main" id="{AB8B1485-E775-4960-A8B1-1B06F616802D}"/>
               </a:ext>
             </a:extLst>
           </p:cNvPr>
@@ -2396,7 +2396,7 @@
     </p:spTree>
     <p:extLst>
       <p:ext uri="{BB962C8B-B14F-4D97-AF65-F5344CB8AC3E}">
-        <p14:creationId xmlns:p14="http://schemas.microsoft.com/office/powerpoint/2010/main" val="1977082314"/>
+        <p14:creationId xmlns:p14="http://schemas.microsoft.com/office/powerpoint/2010/main" val="863612947"/>
       </p:ext>
     </p:extLst>
   </p:cSld>
@@ -2427,7 +2427,7 @@
           <p:cNvPr id="14" name="">
             <a:extLst xmlns:a="http://schemas.openxmlformats.org/drawingml/2006/main">
               <a:ext uri="{FF2B5EF4-FFF2-40B4-BE49-F238E27FC236}">
-                <a16:creationId xmlns:a16="http://schemas.microsoft.com/office/drawing/2014/main" id="{424CD59D-20F3-4B98-B0B2-19012C01DAF2}"/>
+                <a16:creationId xmlns:a16="http://schemas.microsoft.com/office/drawing/2014/main" id="{113D4CF4-3BE8-459F-87E3-4923A1659800}"/>
               </a:ext>
             </a:extLst>
           </p:cNvPr>
@@ -2459,7 +2459,7 @@
           <p:cNvPr id="2" name="">
             <a:extLst xmlns:a="http://schemas.openxmlformats.org/drawingml/2006/main">
               <a:ext uri="{FF2B5EF4-FFF2-40B4-BE49-F238E27FC236}">
-                <a16:creationId xmlns:a16="http://schemas.microsoft.com/office/drawing/2014/main" id="{4A42D331-E475-4A14-8570-3D92B7A07176}"/>
+                <a16:creationId xmlns:a16="http://schemas.microsoft.com/office/drawing/2014/main" id="{171B0DDA-DF2D-4C9C-987C-127C3DBC28F5}"/>
               </a:ext>
             </a:extLst>
           </p:cNvPr>
@@ -2516,7 +2516,7 @@
           <p:cNvPr id="3" name="">
             <a:extLst xmlns:a="http://schemas.openxmlformats.org/drawingml/2006/main">
               <a:ext uri="{FF2B5EF4-FFF2-40B4-BE49-F238E27FC236}">
-                <a16:creationId xmlns:a16="http://schemas.microsoft.com/office/drawing/2014/main" id="{53AC62C4-2375-47D0-BCA4-48DA3BBC8B7B}"/>
+                <a16:creationId xmlns:a16="http://schemas.microsoft.com/office/drawing/2014/main" id="{B7E68208-BEEB-4171-BC83-98C89BEA17AB}"/>
               </a:ext>
             </a:extLst>
           </p:cNvPr>
@@ -2548,7 +2548,7 @@
           <p:cNvPr id="4" name="">
             <a:extLst xmlns:a="http://schemas.openxmlformats.org/drawingml/2006/main">
               <a:ext uri="{FF2B5EF4-FFF2-40B4-BE49-F238E27FC236}">
-                <a16:creationId xmlns:a16="http://schemas.microsoft.com/office/drawing/2014/main" id="{36D73A21-514B-42D2-8DF4-0ADC831D4B4F}"/>
+                <a16:creationId xmlns:a16="http://schemas.microsoft.com/office/drawing/2014/main" id="{29CA87E3-9DF5-4231-8F2C-A432A78AC849}"/>
               </a:ext>
             </a:extLst>
           </p:cNvPr>
@@ -2605,7 +2605,7 @@
           <p:cNvPr id="5" name="">
             <a:extLst xmlns:a="http://schemas.openxmlformats.org/drawingml/2006/main">
               <a:ext uri="{FF2B5EF4-FFF2-40B4-BE49-F238E27FC236}">
-                <a16:creationId xmlns:a16="http://schemas.microsoft.com/office/drawing/2014/main" id="{9AC5EF35-470D-4E72-BEA1-03BF37791B34}"/>
+                <a16:creationId xmlns:a16="http://schemas.microsoft.com/office/drawing/2014/main" id="{4C26A0B8-E31C-43F2-8A7F-5AAB37D55514}"/>
               </a:ext>
             </a:extLst>
           </p:cNvPr>
@@ -2662,7 +2662,7 @@
           <p:cNvPr id="6" name="">
             <a:extLst xmlns:a="http://schemas.openxmlformats.org/drawingml/2006/main">
               <a:ext uri="{FF2B5EF4-FFF2-40B4-BE49-F238E27FC236}">
-                <a16:creationId xmlns:a16="http://schemas.microsoft.com/office/drawing/2014/main" id="{FA2FC398-F6D7-4DB2-AD95-897749DE4E08}"/>
+                <a16:creationId xmlns:a16="http://schemas.microsoft.com/office/drawing/2014/main" id="{DD7CF35B-47E7-48B6-8894-E5D81516E31F}"/>
               </a:ext>
             </a:extLst>
           </p:cNvPr>
@@ -2719,7 +2719,7 @@
           <p:cNvPr id="7" name="">
             <a:extLst xmlns:a="http://schemas.openxmlformats.org/drawingml/2006/main">
               <a:ext uri="{FF2B5EF4-FFF2-40B4-BE49-F238E27FC236}">
-                <a16:creationId xmlns:a16="http://schemas.microsoft.com/office/drawing/2014/main" id="{5928CA8B-7095-4A01-9E16-FDC4419C44BA}"/>
+                <a16:creationId xmlns:a16="http://schemas.microsoft.com/office/drawing/2014/main" id="{99F40BC6-3D2C-46D4-8776-8FC4A7379FF4}"/>
               </a:ext>
             </a:extLst>
           </p:cNvPr>
@@ -2751,7 +2751,7 @@
           <p:cNvPr id="8" name="">
             <a:extLst xmlns:a="http://schemas.openxmlformats.org/drawingml/2006/main">
               <a:ext uri="{FF2B5EF4-FFF2-40B4-BE49-F238E27FC236}">
-                <a16:creationId xmlns:a16="http://schemas.microsoft.com/office/drawing/2014/main" id="{85FC3640-B691-4AC5-9975-4ABDB143C2B0}"/>
+                <a16:creationId xmlns:a16="http://schemas.microsoft.com/office/drawing/2014/main" id="{EEB5A3A6-49B5-4C9C-97CA-172974C9FFF2}"/>
               </a:ext>
             </a:extLst>
           </p:cNvPr>
@@ -2808,7 +2808,7 @@
           <p:cNvPr id="9" name="">
             <a:extLst xmlns:a="http://schemas.openxmlformats.org/drawingml/2006/main">
               <a:ext uri="{FF2B5EF4-FFF2-40B4-BE49-F238E27FC236}">
-                <a16:creationId xmlns:a16="http://schemas.microsoft.com/office/drawing/2014/main" id="{93645105-C89F-4A62-998F-6DC17C967CE5}"/>
+                <a16:creationId xmlns:a16="http://schemas.microsoft.com/office/drawing/2014/main" id="{E422CC08-0ACD-48AD-903E-69DCB7F181C4}"/>
               </a:ext>
             </a:extLst>
           </p:cNvPr>
@@ -2865,7 +2865,7 @@
           <p:cNvPr id="10" name="">
             <a:extLst xmlns:a="http://schemas.openxmlformats.org/drawingml/2006/main">
               <a:ext uri="{FF2B5EF4-FFF2-40B4-BE49-F238E27FC236}">
-                <a16:creationId xmlns:a16="http://schemas.microsoft.com/office/drawing/2014/main" id="{FB51DFE8-7F13-4EE1-B96D-F9D0B7295FA3}"/>
+                <a16:creationId xmlns:a16="http://schemas.microsoft.com/office/drawing/2014/main" id="{4DB3D74F-FBCB-4F67-B206-61D771E39CDA}"/>
               </a:ext>
             </a:extLst>
           </p:cNvPr>
@@ -2922,7 +2922,7 @@
           <p:cNvPr id="11" name="">
             <a:extLst xmlns:a="http://schemas.openxmlformats.org/drawingml/2006/main">
               <a:ext uri="{FF2B5EF4-FFF2-40B4-BE49-F238E27FC236}">
-                <a16:creationId xmlns:a16="http://schemas.microsoft.com/office/drawing/2014/main" id="{89F0501C-C2A3-4D25-98C0-A78215C430FB}"/>
+                <a16:creationId xmlns:a16="http://schemas.microsoft.com/office/drawing/2014/main" id="{50D335EA-7987-404A-9381-363CD5ECB73D}"/>
               </a:ext>
             </a:extLst>
           </p:cNvPr>
@@ -2979,7 +2979,7 @@
           <p:cNvPr id="12" name="">
             <a:extLst xmlns:a="http://schemas.openxmlformats.org/drawingml/2006/main">
               <a:ext uri="{FF2B5EF4-FFF2-40B4-BE49-F238E27FC236}">
-                <a16:creationId xmlns:a16="http://schemas.microsoft.com/office/drawing/2014/main" id="{A2E07338-428C-4BEE-A87D-14240C4B4DC1}"/>
+                <a16:creationId xmlns:a16="http://schemas.microsoft.com/office/drawing/2014/main" id="{878D684A-868F-43EB-8199-62658F724E53}"/>
               </a:ext>
             </a:extLst>
           </p:cNvPr>
@@ -3036,7 +3036,7 @@
           <p:cNvPr id="13" name="">
             <a:extLst xmlns:a="http://schemas.openxmlformats.org/drawingml/2006/main">
               <a:ext uri="{FF2B5EF4-FFF2-40B4-BE49-F238E27FC236}">
-                <a16:creationId xmlns:a16="http://schemas.microsoft.com/office/drawing/2014/main" id="{C0471784-8088-40E9-AAD5-EF3DF6B0315A}"/>
+                <a16:creationId xmlns:a16="http://schemas.microsoft.com/office/drawing/2014/main" id="{D310D8B0-2195-43EA-8F4A-F5FAA97E8184}"/>
               </a:ext>
             </a:extLst>
           </p:cNvPr>
@@ -3091,7 +3091,7 @@
     </p:spTree>
     <p:extLst>
       <p:ext uri="{BB962C8B-B14F-4D97-AF65-F5344CB8AC3E}">
-        <p14:creationId xmlns:p14="http://schemas.microsoft.com/office/powerpoint/2010/main" val="1169395590"/>
+        <p14:creationId xmlns:p14="http://schemas.microsoft.com/office/powerpoint/2010/main" val="208207255"/>
       </p:ext>
     </p:extLst>
   </p:cSld>
@@ -3292,7 +3292,7 @@
           <p:cNvPr id="19" name="">
             <a:extLst xmlns:a="http://schemas.openxmlformats.org/drawingml/2006/main">
               <a:ext uri="{FF2B5EF4-FFF2-40B4-BE49-F238E27FC236}">
-                <a16:creationId xmlns:a16="http://schemas.microsoft.com/office/drawing/2014/main" id="{D429F5DF-8D15-456C-9788-6AAE27DE7DFB}"/>
+                <a16:creationId xmlns:a16="http://schemas.microsoft.com/office/drawing/2014/main" id="{77DC2FA2-DED7-4B2D-AE8D-FE81C3C89FB3}"/>
               </a:ext>
             </a:extLst>
           </p:cNvPr>
@@ -3324,7 +3324,7 @@
           <p:cNvPr id="2" name="">
             <a:extLst xmlns:a="http://schemas.openxmlformats.org/drawingml/2006/main">
               <a:ext uri="{FF2B5EF4-FFF2-40B4-BE49-F238E27FC236}">
-                <a16:creationId xmlns:a16="http://schemas.microsoft.com/office/drawing/2014/main" id="{CC2C17B0-1071-47DC-A68A-2CA4B9FAE0FE}"/>
+                <a16:creationId xmlns:a16="http://schemas.microsoft.com/office/drawing/2014/main" id="{5E74FDDD-1AA8-4E70-8CE4-99E147869D2E}"/>
               </a:ext>
             </a:extLst>
           </p:cNvPr>
@@ -3381,7 +3381,7 @@
           <p:cNvPr id="3" name="">
             <a:extLst xmlns:a="http://schemas.openxmlformats.org/drawingml/2006/main">
               <a:ext uri="{FF2B5EF4-FFF2-40B4-BE49-F238E27FC236}">
-                <a16:creationId xmlns:a16="http://schemas.microsoft.com/office/drawing/2014/main" id="{9EA17E5C-CC07-42DB-A954-43C39B2153E6}"/>
+                <a16:creationId xmlns:a16="http://schemas.microsoft.com/office/drawing/2014/main" id="{F7B532A7-DF05-4A65-93E0-6FC61D2CAE31}"/>
               </a:ext>
             </a:extLst>
           </p:cNvPr>
@@ -3413,7 +3413,7 @@
           <p:cNvPr id="4" name="">
             <a:extLst xmlns:a="http://schemas.openxmlformats.org/drawingml/2006/main">
               <a:ext uri="{FF2B5EF4-FFF2-40B4-BE49-F238E27FC236}">
-                <a16:creationId xmlns:a16="http://schemas.microsoft.com/office/drawing/2014/main" id="{55E926F4-2A3D-46CC-B427-CA0E6BB75139}"/>
+                <a16:creationId xmlns:a16="http://schemas.microsoft.com/office/drawing/2014/main" id="{156760BF-6527-4289-83AA-1A5780565973}"/>
               </a:ext>
             </a:extLst>
           </p:cNvPr>
@@ -3470,7 +3470,7 @@
           <p:cNvPr id="5" name="">
             <a:extLst xmlns:a="http://schemas.openxmlformats.org/drawingml/2006/main">
               <a:ext uri="{FF2B5EF4-FFF2-40B4-BE49-F238E27FC236}">
-                <a16:creationId xmlns:a16="http://schemas.microsoft.com/office/drawing/2014/main" id="{1EC52BFC-E45D-4B41-B90C-38E8DC4E1BB4}"/>
+                <a16:creationId xmlns:a16="http://schemas.microsoft.com/office/drawing/2014/main" id="{CBE60407-6201-4EA3-90C0-8E76A1D91FA2}"/>
               </a:ext>
             </a:extLst>
           </p:cNvPr>
@@ -3527,7 +3527,7 @@
           <p:cNvPr id="6" name="">
             <a:extLst xmlns:a="http://schemas.openxmlformats.org/drawingml/2006/main">
               <a:ext uri="{FF2B5EF4-FFF2-40B4-BE49-F238E27FC236}">
-                <a16:creationId xmlns:a16="http://schemas.microsoft.com/office/drawing/2014/main" id="{A917B856-D53A-419F-BD6E-C5B4D52DF09E}"/>
+                <a16:creationId xmlns:a16="http://schemas.microsoft.com/office/drawing/2014/main" id="{AACB251D-C4F5-46DC-A2F4-F79961294BCA}"/>
               </a:ext>
             </a:extLst>
           </p:cNvPr>
@@ -3584,7 +3584,7 @@
           <p:cNvPr id="7" name="">
             <a:extLst xmlns:a="http://schemas.openxmlformats.org/drawingml/2006/main">
               <a:ext uri="{FF2B5EF4-FFF2-40B4-BE49-F238E27FC236}">
-                <a16:creationId xmlns:a16="http://schemas.microsoft.com/office/drawing/2014/main" id="{3C42798F-F114-4DDB-A85D-99F0A3EB90A0}"/>
+                <a16:creationId xmlns:a16="http://schemas.microsoft.com/office/drawing/2014/main" id="{5C8AFDAB-9968-446F-B0B5-ED3464065BC9}"/>
               </a:ext>
             </a:extLst>
           </p:cNvPr>
@@ -3616,7 +3616,7 @@
           <p:cNvPr id="8" name="">
             <a:extLst xmlns:a="http://schemas.openxmlformats.org/drawingml/2006/main">
               <a:ext uri="{FF2B5EF4-FFF2-40B4-BE49-F238E27FC236}">
-                <a16:creationId xmlns:a16="http://schemas.microsoft.com/office/drawing/2014/main" id="{4EDFD8FD-45FE-42D1-A778-5B17035E33E1}"/>
+                <a16:creationId xmlns:a16="http://schemas.microsoft.com/office/drawing/2014/main" id="{4BE9C9EC-7E9D-452E-817B-3460A3AC5BF1}"/>
               </a:ext>
             </a:extLst>
           </p:cNvPr>
@@ -3673,7 +3673,7 @@
           <p:cNvPr id="9" name="">
             <a:extLst xmlns:a="http://schemas.openxmlformats.org/drawingml/2006/main">
               <a:ext uri="{FF2B5EF4-FFF2-40B4-BE49-F238E27FC236}">
-                <a16:creationId xmlns:a16="http://schemas.microsoft.com/office/drawing/2014/main" id="{F5C149BF-6DA4-464F-802E-61A422F5FF94}"/>
+                <a16:creationId xmlns:a16="http://schemas.microsoft.com/office/drawing/2014/main" id="{B6D7B2FA-817B-4686-9339-CD4C37273390}"/>
               </a:ext>
             </a:extLst>
           </p:cNvPr>
@@ -3730,7 +3730,7 @@
           <p:cNvPr id="10" name="">
             <a:extLst xmlns:a="http://schemas.openxmlformats.org/drawingml/2006/main">
               <a:ext uri="{FF2B5EF4-FFF2-40B4-BE49-F238E27FC236}">
-                <a16:creationId xmlns:a16="http://schemas.microsoft.com/office/drawing/2014/main" id="{CDC049B1-59FB-4F6D-9F8E-BB13E1BE7238}"/>
+                <a16:creationId xmlns:a16="http://schemas.microsoft.com/office/drawing/2014/main" id="{71F9F843-1F0A-4194-8F61-4778B8516AD8}"/>
               </a:ext>
             </a:extLst>
           </p:cNvPr>
@@ -3787,7 +3787,7 @@
           <p:cNvPr id="11" name="">
             <a:extLst xmlns:a="http://schemas.openxmlformats.org/drawingml/2006/main">
               <a:ext uri="{FF2B5EF4-FFF2-40B4-BE49-F238E27FC236}">
-                <a16:creationId xmlns:a16="http://schemas.microsoft.com/office/drawing/2014/main" id="{279420A1-76AA-4E02-8B3B-8870375A60C0}"/>
+                <a16:creationId xmlns:a16="http://schemas.microsoft.com/office/drawing/2014/main" id="{4C630BE2-15AC-4C29-A96A-07AA3F92D483}"/>
               </a:ext>
             </a:extLst>
           </p:cNvPr>
@@ -3821,7 +3821,7 @@
           <p:cNvPr id="12" name="">
             <a:extLst xmlns:a="http://schemas.openxmlformats.org/drawingml/2006/main">
               <a:ext uri="{FF2B5EF4-FFF2-40B4-BE49-F238E27FC236}">
-                <a16:creationId xmlns:a16="http://schemas.microsoft.com/office/drawing/2014/main" id="{A3D88943-243E-4FA0-9DA1-77F91D63073D}"/>
+                <a16:creationId xmlns:a16="http://schemas.microsoft.com/office/drawing/2014/main" id="{771726A7-4FD3-49B8-AB1E-89ECC823AE3E}"/>
               </a:ext>
             </a:extLst>
           </p:cNvPr>
@@ -3878,7 +3878,7 @@
           <p:cNvPr id="13" name="">
             <a:extLst xmlns:a="http://schemas.openxmlformats.org/drawingml/2006/main">
               <a:ext uri="{FF2B5EF4-FFF2-40B4-BE49-F238E27FC236}">
-                <a16:creationId xmlns:a16="http://schemas.microsoft.com/office/drawing/2014/main" id="{E7D305A1-C69A-470E-8E3F-77F0C3D6C13B}"/>
+                <a16:creationId xmlns:a16="http://schemas.microsoft.com/office/drawing/2014/main" id="{7223C1A6-033C-489A-87DC-E3C08D5D910D}"/>
               </a:ext>
             </a:extLst>
           </p:cNvPr>
@@ -3935,7 +3935,7 @@
           <p:cNvPr id="14" name="">
             <a:extLst xmlns:a="http://schemas.openxmlformats.org/drawingml/2006/main">
               <a:ext uri="{FF2B5EF4-FFF2-40B4-BE49-F238E27FC236}">
-                <a16:creationId xmlns:a16="http://schemas.microsoft.com/office/drawing/2014/main" id="{65C08A3C-30B8-493E-BF9E-A3F0C2152FD6}"/>
+                <a16:creationId xmlns:a16="http://schemas.microsoft.com/office/drawing/2014/main" id="{D3EE2605-D90E-420F-9CFB-F44C3FDEA53A}"/>
               </a:ext>
             </a:extLst>
           </p:cNvPr>
@@ -3992,7 +3992,7 @@
           <p:cNvPr id="15" name="">
             <a:extLst xmlns:a="http://schemas.openxmlformats.org/drawingml/2006/main">
               <a:ext uri="{FF2B5EF4-FFF2-40B4-BE49-F238E27FC236}">
-                <a16:creationId xmlns:a16="http://schemas.microsoft.com/office/drawing/2014/main" id="{F7E7C72E-88A8-4BEC-889D-4C7E975579C0}"/>
+                <a16:creationId xmlns:a16="http://schemas.microsoft.com/office/drawing/2014/main" id="{41218672-51A9-4C5B-950F-6224753F8549}"/>
               </a:ext>
             </a:extLst>
           </p:cNvPr>
@@ -4026,7 +4026,7 @@
           <p:cNvPr id="16" name="">
             <a:extLst xmlns:a="http://schemas.openxmlformats.org/drawingml/2006/main">
               <a:ext uri="{FF2B5EF4-FFF2-40B4-BE49-F238E27FC236}">
-                <a16:creationId xmlns:a16="http://schemas.microsoft.com/office/drawing/2014/main" id="{2AD37ABF-DDAC-4855-AD28-16DAE8E0DA4E}"/>
+                <a16:creationId xmlns:a16="http://schemas.microsoft.com/office/drawing/2014/main" id="{F08FA4D0-D8B3-436D-BCDA-329AA063CE0F}"/>
               </a:ext>
             </a:extLst>
           </p:cNvPr>
@@ -4083,7 +4083,7 @@
           <p:cNvPr id="17" name="">
             <a:extLst xmlns:a="http://schemas.openxmlformats.org/drawingml/2006/main">
               <a:ext uri="{FF2B5EF4-FFF2-40B4-BE49-F238E27FC236}">
-                <a16:creationId xmlns:a16="http://schemas.microsoft.com/office/drawing/2014/main" id="{D17637D1-44AE-4892-A46E-B4A14BE38F17}"/>
+                <a16:creationId xmlns:a16="http://schemas.microsoft.com/office/drawing/2014/main" id="{4D531F5C-3EDB-4519-8D29-150E6886E37D}"/>
               </a:ext>
             </a:extLst>
           </p:cNvPr>
@@ -4140,7 +4140,7 @@
           <p:cNvPr id="18" name="">
             <a:extLst xmlns:a="http://schemas.openxmlformats.org/drawingml/2006/main">
               <a:ext uri="{FF2B5EF4-FFF2-40B4-BE49-F238E27FC236}">
-                <a16:creationId xmlns:a16="http://schemas.microsoft.com/office/drawing/2014/main" id="{00AB3A58-3212-43D2-99C7-46BF19268EDC}"/>
+                <a16:creationId xmlns:a16="http://schemas.microsoft.com/office/drawing/2014/main" id="{5CDBE333-91C3-4524-908E-252027DB389D}"/>
               </a:ext>
             </a:extLst>
           </p:cNvPr>
@@ -4195,7 +4195,7 @@
     </p:spTree>
     <p:extLst>
       <p:ext uri="{BB962C8B-B14F-4D97-AF65-F5344CB8AC3E}">
-        <p14:creationId xmlns:p14="http://schemas.microsoft.com/office/powerpoint/2010/main" val="1683259617"/>
+        <p14:creationId xmlns:p14="http://schemas.microsoft.com/office/powerpoint/2010/main" val="116795179"/>
       </p:ext>
     </p:extLst>
   </p:cSld>
@@ -4350,7 +4350,7 @@
           <p:cNvPr id="23" name="">
             <a:extLst xmlns:a="http://schemas.openxmlformats.org/drawingml/2006/main">
               <a:ext uri="{FF2B5EF4-FFF2-40B4-BE49-F238E27FC236}">
-                <a16:creationId xmlns:a16="http://schemas.microsoft.com/office/drawing/2014/main" id="{AD50DC11-D27E-4E07-A380-510B1FC01A8F}"/>
+                <a16:creationId xmlns:a16="http://schemas.microsoft.com/office/drawing/2014/main" id="{34628FA9-F349-4E85-AE0E-AB61F86BE140}"/>
               </a:ext>
             </a:extLst>
           </p:cNvPr>
@@ -4382,7 +4382,7 @@
           <p:cNvPr id="2" name="">
             <a:extLst xmlns:a="http://schemas.openxmlformats.org/drawingml/2006/main">
               <a:ext uri="{FF2B5EF4-FFF2-40B4-BE49-F238E27FC236}">
-                <a16:creationId xmlns:a16="http://schemas.microsoft.com/office/drawing/2014/main" id="{9380C5AD-953E-4F62-A8AA-984787224389}"/>
+                <a16:creationId xmlns:a16="http://schemas.microsoft.com/office/drawing/2014/main" id="{E08CB611-9BF8-4DD9-80FE-0DB8A86AE53E}"/>
               </a:ext>
             </a:extLst>
           </p:cNvPr>
@@ -4439,7 +4439,7 @@
           <p:cNvPr id="3" name="">
             <a:extLst xmlns:a="http://schemas.openxmlformats.org/drawingml/2006/main">
               <a:ext uri="{FF2B5EF4-FFF2-40B4-BE49-F238E27FC236}">
-                <a16:creationId xmlns:a16="http://schemas.microsoft.com/office/drawing/2014/main" id="{2E6E744F-A64E-41AF-BB61-CC8EF8860250}"/>
+                <a16:creationId xmlns:a16="http://schemas.microsoft.com/office/drawing/2014/main" id="{BC7A1C95-E2D0-4E39-BF4F-7CBF9FCCA06B}"/>
               </a:ext>
             </a:extLst>
           </p:cNvPr>
@@ -4471,7 +4471,7 @@
           <p:cNvPr id="4" name="">
             <a:extLst xmlns:a="http://schemas.openxmlformats.org/drawingml/2006/main">
               <a:ext uri="{FF2B5EF4-FFF2-40B4-BE49-F238E27FC236}">
-                <a16:creationId xmlns:a16="http://schemas.microsoft.com/office/drawing/2014/main" id="{B81DC21C-4D3C-4719-A544-8D9CB95E0BDF}"/>
+                <a16:creationId xmlns:a16="http://schemas.microsoft.com/office/drawing/2014/main" id="{0EA09370-B4C6-4BFB-8789-8EADE512B917}"/>
               </a:ext>
             </a:extLst>
           </p:cNvPr>
@@ -4528,7 +4528,7 @@
           <p:cNvPr id="5" name="">
             <a:extLst xmlns:a="http://schemas.openxmlformats.org/drawingml/2006/main">
               <a:ext uri="{FF2B5EF4-FFF2-40B4-BE49-F238E27FC236}">
-                <a16:creationId xmlns:a16="http://schemas.microsoft.com/office/drawing/2014/main" id="{AFA29B02-F5A7-47F1-B071-F2A6B5B8316C}"/>
+                <a16:creationId xmlns:a16="http://schemas.microsoft.com/office/drawing/2014/main" id="{41B38C4C-DDF5-4182-B9C8-35A3290D76F2}"/>
               </a:ext>
             </a:extLst>
           </p:cNvPr>
@@ -4585,7 +4585,7 @@
           <p:cNvPr id="6" name="">
             <a:extLst xmlns:a="http://schemas.openxmlformats.org/drawingml/2006/main">
               <a:ext uri="{FF2B5EF4-FFF2-40B4-BE49-F238E27FC236}">
-                <a16:creationId xmlns:a16="http://schemas.microsoft.com/office/drawing/2014/main" id="{E74BB514-CDF4-4E75-98B4-E37666C9B111}"/>
+                <a16:creationId xmlns:a16="http://schemas.microsoft.com/office/drawing/2014/main" id="{A51CB255-6FDC-405E-8A95-76C53BB12E22}"/>
               </a:ext>
             </a:extLst>
           </p:cNvPr>
@@ -4642,7 +4642,7 @@
           <p:cNvPr id="7" name="">
             <a:extLst xmlns:a="http://schemas.openxmlformats.org/drawingml/2006/main">
               <a:ext uri="{FF2B5EF4-FFF2-40B4-BE49-F238E27FC236}">
-                <a16:creationId xmlns:a16="http://schemas.microsoft.com/office/drawing/2014/main" id="{423EE660-65AA-4493-991A-9D098649B4F0}"/>
+                <a16:creationId xmlns:a16="http://schemas.microsoft.com/office/drawing/2014/main" id="{0142F514-8DB2-4846-8A1C-37D1DA732D75}"/>
               </a:ext>
             </a:extLst>
           </p:cNvPr>
@@ -4674,7 +4674,7 @@
           <p:cNvPr id="8" name="">
             <a:extLst xmlns:a="http://schemas.openxmlformats.org/drawingml/2006/main">
               <a:ext uri="{FF2B5EF4-FFF2-40B4-BE49-F238E27FC236}">
-                <a16:creationId xmlns:a16="http://schemas.microsoft.com/office/drawing/2014/main" id="{B01531CF-C137-44BD-8D8C-8D3A9E1A90F6}"/>
+                <a16:creationId xmlns:a16="http://schemas.microsoft.com/office/drawing/2014/main" id="{0507BB5A-452D-4329-A951-48DAF6347BDD}"/>
               </a:ext>
             </a:extLst>
           </p:cNvPr>
@@ -4731,7 +4731,7 @@
           <p:cNvPr id="9" name="">
             <a:extLst xmlns:a="http://schemas.openxmlformats.org/drawingml/2006/main">
               <a:ext uri="{FF2B5EF4-FFF2-40B4-BE49-F238E27FC236}">
-                <a16:creationId xmlns:a16="http://schemas.microsoft.com/office/drawing/2014/main" id="{CD578DCD-6248-4C77-B57B-051B6D444A67}"/>
+                <a16:creationId xmlns:a16="http://schemas.microsoft.com/office/drawing/2014/main" id="{2FAD82E8-3EF4-4366-96D7-7D24F1132AED}"/>
               </a:ext>
             </a:extLst>
           </p:cNvPr>
@@ -4788,7 +4788,7 @@
           <p:cNvPr id="10" name="">
             <a:extLst xmlns:a="http://schemas.openxmlformats.org/drawingml/2006/main">
               <a:ext uri="{FF2B5EF4-FFF2-40B4-BE49-F238E27FC236}">
-                <a16:creationId xmlns:a16="http://schemas.microsoft.com/office/drawing/2014/main" id="{C1427819-98BB-45C3-942C-88493D8DEFFC}"/>
+                <a16:creationId xmlns:a16="http://schemas.microsoft.com/office/drawing/2014/main" id="{9D4ADC7F-79DD-45B6-AECB-306041A2EFA4}"/>
               </a:ext>
             </a:extLst>
           </p:cNvPr>
@@ -4822,7 +4822,7 @@
           <p:cNvPr id="11" name="">
             <a:extLst xmlns:a="http://schemas.openxmlformats.org/drawingml/2006/main">
               <a:ext uri="{FF2B5EF4-FFF2-40B4-BE49-F238E27FC236}">
-                <a16:creationId xmlns:a16="http://schemas.microsoft.com/office/drawing/2014/main" id="{4D29D117-6229-4432-9B91-334DB52B5093}"/>
+                <a16:creationId xmlns:a16="http://schemas.microsoft.com/office/drawing/2014/main" id="{BE4C2706-6A22-4A80-B25B-6B33AA5A3201}"/>
               </a:ext>
             </a:extLst>
           </p:cNvPr>
@@ -4854,7 +4854,7 @@
           <p:cNvPr id="12" name="">
             <a:extLst xmlns:a="http://schemas.openxmlformats.org/drawingml/2006/main">
               <a:ext uri="{FF2B5EF4-FFF2-40B4-BE49-F238E27FC236}">
-                <a16:creationId xmlns:a16="http://schemas.microsoft.com/office/drawing/2014/main" id="{550DE475-E365-430A-8500-B7EC2139C10A}"/>
+                <a16:creationId xmlns:a16="http://schemas.microsoft.com/office/drawing/2014/main" id="{4D18BCF1-0739-4FBF-8E20-A12282F2B5FB}"/>
               </a:ext>
             </a:extLst>
           </p:cNvPr>
@@ -4911,7 +4911,7 @@
           <p:cNvPr id="13" name="">
             <a:extLst xmlns:a="http://schemas.openxmlformats.org/drawingml/2006/main">
               <a:ext uri="{FF2B5EF4-FFF2-40B4-BE49-F238E27FC236}">
-                <a16:creationId xmlns:a16="http://schemas.microsoft.com/office/drawing/2014/main" id="{CAAC938F-2D7F-4C9A-B25C-DA05D8537097}"/>
+                <a16:creationId xmlns:a16="http://schemas.microsoft.com/office/drawing/2014/main" id="{AD1DC391-8229-49DD-8CAB-165EDD4D2F90}"/>
               </a:ext>
             </a:extLst>
           </p:cNvPr>
@@ -4968,7 +4968,7 @@
           <p:cNvPr id="14" name="">
             <a:extLst xmlns:a="http://schemas.openxmlformats.org/drawingml/2006/main">
               <a:ext uri="{FF2B5EF4-FFF2-40B4-BE49-F238E27FC236}">
-                <a16:creationId xmlns:a16="http://schemas.microsoft.com/office/drawing/2014/main" id="{F36EDD8C-D322-4F24-8CBB-BFBF3AB0418C}"/>
+                <a16:creationId xmlns:a16="http://schemas.microsoft.com/office/drawing/2014/main" id="{AEA44C35-6FEB-48C7-A8A1-E0B84C242251}"/>
               </a:ext>
             </a:extLst>
           </p:cNvPr>
@@ -5002,7 +5002,7 @@
           <p:cNvPr id="15" name="">
             <a:extLst xmlns:a="http://schemas.openxmlformats.org/drawingml/2006/main">
               <a:ext uri="{FF2B5EF4-FFF2-40B4-BE49-F238E27FC236}">
-                <a16:creationId xmlns:a16="http://schemas.microsoft.com/office/drawing/2014/main" id="{11D9F112-4B57-44B4-955A-476226FAFDF0}"/>
+                <a16:creationId xmlns:a16="http://schemas.microsoft.com/office/drawing/2014/main" id="{1562C0C0-1AEB-404C-869D-F78035E86949}"/>
               </a:ext>
             </a:extLst>
           </p:cNvPr>
@@ -5034,7 +5034,7 @@
           <p:cNvPr id="16" name="">
             <a:extLst xmlns:a="http://schemas.openxmlformats.org/drawingml/2006/main">
               <a:ext uri="{FF2B5EF4-FFF2-40B4-BE49-F238E27FC236}">
-                <a16:creationId xmlns:a16="http://schemas.microsoft.com/office/drawing/2014/main" id="{48AECDC6-1527-40D8-8FC8-02A583F9211F}"/>
+                <a16:creationId xmlns:a16="http://schemas.microsoft.com/office/drawing/2014/main" id="{F4B1358C-01DA-4BE2-8456-EF88FBCB386F}"/>
               </a:ext>
             </a:extLst>
           </p:cNvPr>
@@ -5091,7 +5091,7 @@
           <p:cNvPr id="17" name="">
             <a:extLst xmlns:a="http://schemas.openxmlformats.org/drawingml/2006/main">
               <a:ext uri="{FF2B5EF4-FFF2-40B4-BE49-F238E27FC236}">
-                <a16:creationId xmlns:a16="http://schemas.microsoft.com/office/drawing/2014/main" id="{25206A50-3192-4117-B9B2-623496068448}"/>
+                <a16:creationId xmlns:a16="http://schemas.microsoft.com/office/drawing/2014/main" id="{4365871D-5F73-4B07-978D-444094F21A4A}"/>
               </a:ext>
             </a:extLst>
           </p:cNvPr>
@@ -5148,7 +5148,7 @@
           <p:cNvPr id="18" name="">
             <a:extLst xmlns:a="http://schemas.openxmlformats.org/drawingml/2006/main">
               <a:ext uri="{FF2B5EF4-FFF2-40B4-BE49-F238E27FC236}">
-                <a16:creationId xmlns:a16="http://schemas.microsoft.com/office/drawing/2014/main" id="{48751200-4A55-41A3-96AA-E7B35B0D825A}"/>
+                <a16:creationId xmlns:a16="http://schemas.microsoft.com/office/drawing/2014/main" id="{DF20BBB8-E2D2-47C7-B963-895DD97FD1A9}"/>
               </a:ext>
             </a:extLst>
           </p:cNvPr>
@@ -5182,7 +5182,7 @@
           <p:cNvPr id="19" name="">
             <a:extLst xmlns:a="http://schemas.openxmlformats.org/drawingml/2006/main">
               <a:ext uri="{FF2B5EF4-FFF2-40B4-BE49-F238E27FC236}">
-                <a16:creationId xmlns:a16="http://schemas.microsoft.com/office/drawing/2014/main" id="{16CF26BF-4920-4B43-B2BA-38AE8BB13E94}"/>
+                <a16:creationId xmlns:a16="http://schemas.microsoft.com/office/drawing/2014/main" id="{95EC3147-E904-48C4-8FA3-00390948479D}"/>
               </a:ext>
             </a:extLst>
           </p:cNvPr>
@@ -5214,7 +5214,7 @@
           <p:cNvPr id="20" name="">
             <a:extLst xmlns:a="http://schemas.openxmlformats.org/drawingml/2006/main">
               <a:ext uri="{FF2B5EF4-FFF2-40B4-BE49-F238E27FC236}">
-                <a16:creationId xmlns:a16="http://schemas.microsoft.com/office/drawing/2014/main" id="{FD7B8AA4-838E-435B-B3AD-5265004E0A88}"/>
+                <a16:creationId xmlns:a16="http://schemas.microsoft.com/office/drawing/2014/main" id="{5739EF7F-8797-474B-9E52-B5E860FD10A9}"/>
               </a:ext>
             </a:extLst>
           </p:cNvPr>
@@ -5271,7 +5271,7 @@
           <p:cNvPr id="21" name="">
             <a:extLst xmlns:a="http://schemas.openxmlformats.org/drawingml/2006/main">
               <a:ext uri="{FF2B5EF4-FFF2-40B4-BE49-F238E27FC236}">
-                <a16:creationId xmlns:a16="http://schemas.microsoft.com/office/drawing/2014/main" id="{93C290A7-9E9A-4575-AF03-90861BE45830}"/>
+                <a16:creationId xmlns:a16="http://schemas.microsoft.com/office/drawing/2014/main" id="{78CD192D-203B-4DFA-91AF-EF3B1B9867F1}"/>
               </a:ext>
             </a:extLst>
           </p:cNvPr>
@@ -5328,7 +5328,7 @@
           <p:cNvPr id="22" name="">
             <a:extLst xmlns:a="http://schemas.openxmlformats.org/drawingml/2006/main">
               <a:ext uri="{FF2B5EF4-FFF2-40B4-BE49-F238E27FC236}">
-                <a16:creationId xmlns:a16="http://schemas.microsoft.com/office/drawing/2014/main" id="{575A1516-7EF4-4E12-ADDC-060123D65F84}"/>
+                <a16:creationId xmlns:a16="http://schemas.microsoft.com/office/drawing/2014/main" id="{8085DC9F-F6C1-497F-8F99-01C8B52A03A4}"/>
               </a:ext>
             </a:extLst>
           </p:cNvPr>
@@ -5383,7 +5383,7 @@
     </p:spTree>
     <p:extLst>
       <p:ext uri="{BB962C8B-B14F-4D97-AF65-F5344CB8AC3E}">
-        <p14:creationId xmlns:p14="http://schemas.microsoft.com/office/powerpoint/2010/main" val="2134809276"/>
+        <p14:creationId xmlns:p14="http://schemas.microsoft.com/office/powerpoint/2010/main" val="21284375"/>
       </p:ext>
     </p:extLst>
   </p:cSld>
@@ -5584,7 +5584,7 @@
           <p:cNvPr id="23" name="">
             <a:extLst xmlns:a="http://schemas.openxmlformats.org/drawingml/2006/main">
               <a:ext uri="{FF2B5EF4-FFF2-40B4-BE49-F238E27FC236}">
-                <a16:creationId xmlns:a16="http://schemas.microsoft.com/office/drawing/2014/main" id="{C0934274-2870-4CF1-B2B2-4B821E55D97C}"/>
+                <a16:creationId xmlns:a16="http://schemas.microsoft.com/office/drawing/2014/main" id="{878FF115-DB10-448E-B38D-EC829B423BFB}"/>
               </a:ext>
             </a:extLst>
           </p:cNvPr>
@@ -5616,7 +5616,7 @@
           <p:cNvPr id="2" name="">
             <a:extLst xmlns:a="http://schemas.openxmlformats.org/drawingml/2006/main">
               <a:ext uri="{FF2B5EF4-FFF2-40B4-BE49-F238E27FC236}">
-                <a16:creationId xmlns:a16="http://schemas.microsoft.com/office/drawing/2014/main" id="{3CC70DFE-9B89-4E36-AF1B-0578C2ED9574}"/>
+                <a16:creationId xmlns:a16="http://schemas.microsoft.com/office/drawing/2014/main" id="{05AEDCA4-8B6E-44D2-ABD0-F60F135ED3C1}"/>
               </a:ext>
             </a:extLst>
           </p:cNvPr>
@@ -5673,7 +5673,7 @@
           <p:cNvPr id="3" name="">
             <a:extLst xmlns:a="http://schemas.openxmlformats.org/drawingml/2006/main">
               <a:ext uri="{FF2B5EF4-FFF2-40B4-BE49-F238E27FC236}">
-                <a16:creationId xmlns:a16="http://schemas.microsoft.com/office/drawing/2014/main" id="{CB564C6D-1325-46EA-866E-5716D6A2C78C}"/>
+                <a16:creationId xmlns:a16="http://schemas.microsoft.com/office/drawing/2014/main" id="{FB783570-37D2-4445-B948-9D400E8019B4}"/>
               </a:ext>
             </a:extLst>
           </p:cNvPr>
@@ -5705,7 +5705,7 @@
           <p:cNvPr id="4" name="">
             <a:extLst xmlns:a="http://schemas.openxmlformats.org/drawingml/2006/main">
               <a:ext uri="{FF2B5EF4-FFF2-40B4-BE49-F238E27FC236}">
-                <a16:creationId xmlns:a16="http://schemas.microsoft.com/office/drawing/2014/main" id="{A0F0E841-C959-44D2-96FB-ECC20A4555AE}"/>
+                <a16:creationId xmlns:a16="http://schemas.microsoft.com/office/drawing/2014/main" id="{61886CDD-420D-4795-BA64-5455D6C4A99E}"/>
               </a:ext>
             </a:extLst>
           </p:cNvPr>
@@ -5762,7 +5762,7 @@
           <p:cNvPr id="5" name="">
             <a:extLst xmlns:a="http://schemas.openxmlformats.org/drawingml/2006/main">
               <a:ext uri="{FF2B5EF4-FFF2-40B4-BE49-F238E27FC236}">
-                <a16:creationId xmlns:a16="http://schemas.microsoft.com/office/drawing/2014/main" id="{A1D24D8A-69EB-40B5-BB01-3FBAEF45E79B}"/>
+                <a16:creationId xmlns:a16="http://schemas.microsoft.com/office/drawing/2014/main" id="{329C91DC-5FF0-4DFF-B6DC-DB3FC88083EF}"/>
               </a:ext>
             </a:extLst>
           </p:cNvPr>
@@ -5819,7 +5819,7 @@
           <p:cNvPr id="6" name="">
             <a:extLst xmlns:a="http://schemas.openxmlformats.org/drawingml/2006/main">
               <a:ext uri="{FF2B5EF4-FFF2-40B4-BE49-F238E27FC236}">
-                <a16:creationId xmlns:a16="http://schemas.microsoft.com/office/drawing/2014/main" id="{4C4385D3-C154-40CF-B3EF-D6001AEB581C}"/>
+                <a16:creationId xmlns:a16="http://schemas.microsoft.com/office/drawing/2014/main" id="{80F2D05B-DF82-4889-B65E-D1342754E666}"/>
               </a:ext>
             </a:extLst>
           </p:cNvPr>
@@ -5876,7 +5876,7 @@
           <p:cNvPr id="7" name="">
             <a:extLst xmlns:a="http://schemas.openxmlformats.org/drawingml/2006/main">
               <a:ext uri="{FF2B5EF4-FFF2-40B4-BE49-F238E27FC236}">
-                <a16:creationId xmlns:a16="http://schemas.microsoft.com/office/drawing/2014/main" id="{9ACD1EE1-CB9E-40CD-A6AE-873688C2E308}"/>
+                <a16:creationId xmlns:a16="http://schemas.microsoft.com/office/drawing/2014/main" id="{2F119DA3-6B95-4B56-9311-08496BB72A4C}"/>
               </a:ext>
             </a:extLst>
           </p:cNvPr>
@@ -5908,7 +5908,7 @@
           <p:cNvPr id="8" name="">
             <a:extLst xmlns:a="http://schemas.openxmlformats.org/drawingml/2006/main">
               <a:ext uri="{FF2B5EF4-FFF2-40B4-BE49-F238E27FC236}">
-                <a16:creationId xmlns:a16="http://schemas.microsoft.com/office/drawing/2014/main" id="{73C191B2-D426-4064-B55A-AD777CC1ACC9}"/>
+                <a16:creationId xmlns:a16="http://schemas.microsoft.com/office/drawing/2014/main" id="{185ADC25-699C-438C-896E-218AB508BD72}"/>
               </a:ext>
             </a:extLst>
           </p:cNvPr>
@@ -5965,7 +5965,7 @@
           <p:cNvPr id="9" name="">
             <a:extLst xmlns:a="http://schemas.openxmlformats.org/drawingml/2006/main">
               <a:ext uri="{FF2B5EF4-FFF2-40B4-BE49-F238E27FC236}">
-                <a16:creationId xmlns:a16="http://schemas.microsoft.com/office/drawing/2014/main" id="{C451A5AD-AAA4-4F5D-B88F-76BF4E87822C}"/>
+                <a16:creationId xmlns:a16="http://schemas.microsoft.com/office/drawing/2014/main" id="{BC0BD6A8-B207-4B48-91BD-97AFFD4EF5A1}"/>
               </a:ext>
             </a:extLst>
           </p:cNvPr>
@@ -6022,7 +6022,7 @@
           <p:cNvPr id="10" name="">
             <a:extLst xmlns:a="http://schemas.openxmlformats.org/drawingml/2006/main">
               <a:ext uri="{FF2B5EF4-FFF2-40B4-BE49-F238E27FC236}">
-                <a16:creationId xmlns:a16="http://schemas.microsoft.com/office/drawing/2014/main" id="{B3ACE4F1-FFAA-48A6-BF94-1E5AE2B82A01}"/>
+                <a16:creationId xmlns:a16="http://schemas.microsoft.com/office/drawing/2014/main" id="{10F25240-0B0A-411F-858D-E8CF5615F41C}"/>
               </a:ext>
             </a:extLst>
           </p:cNvPr>
@@ -6056,7 +6056,7 @@
           <p:cNvPr id="11" name="">
             <a:extLst xmlns:a="http://schemas.openxmlformats.org/drawingml/2006/main">
               <a:ext uri="{FF2B5EF4-FFF2-40B4-BE49-F238E27FC236}">
-                <a16:creationId xmlns:a16="http://schemas.microsoft.com/office/drawing/2014/main" id="{515134B3-D067-4435-8E14-ABF6EDA8C6F5}"/>
+                <a16:creationId xmlns:a16="http://schemas.microsoft.com/office/drawing/2014/main" id="{8AF3156E-11D8-41E5-8EDA-C4D55CECBA81}"/>
               </a:ext>
             </a:extLst>
           </p:cNvPr>
@@ -6088,7 +6088,7 @@
           <p:cNvPr id="12" name="">
             <a:extLst xmlns:a="http://schemas.openxmlformats.org/drawingml/2006/main">
               <a:ext uri="{FF2B5EF4-FFF2-40B4-BE49-F238E27FC236}">
-                <a16:creationId xmlns:a16="http://schemas.microsoft.com/office/drawing/2014/main" id="{41894E12-E2D0-4FB9-A208-945236688B6C}"/>
+                <a16:creationId xmlns:a16="http://schemas.microsoft.com/office/drawing/2014/main" id="{9EB861C5-5A34-4B8B-99D1-4569D669723B}"/>
               </a:ext>
             </a:extLst>
           </p:cNvPr>
@@ -6145,7 +6145,7 @@
           <p:cNvPr id="13" name="">
             <a:extLst xmlns:a="http://schemas.openxmlformats.org/drawingml/2006/main">
               <a:ext uri="{FF2B5EF4-FFF2-40B4-BE49-F238E27FC236}">
-                <a16:creationId xmlns:a16="http://schemas.microsoft.com/office/drawing/2014/main" id="{A01A3ADE-3C77-48A9-B1BE-20B27E232797}"/>
+                <a16:creationId xmlns:a16="http://schemas.microsoft.com/office/drawing/2014/main" id="{D4D9F9D2-D016-4DD6-BBDC-B8D04425A260}"/>
               </a:ext>
             </a:extLst>
           </p:cNvPr>
@@ -6202,7 +6202,7 @@
           <p:cNvPr id="14" name="">
             <a:extLst xmlns:a="http://schemas.openxmlformats.org/drawingml/2006/main">
               <a:ext uri="{FF2B5EF4-FFF2-40B4-BE49-F238E27FC236}">
-                <a16:creationId xmlns:a16="http://schemas.microsoft.com/office/drawing/2014/main" id="{D04DB257-D345-4D71-A182-432F7FC886F1}"/>
+                <a16:creationId xmlns:a16="http://schemas.microsoft.com/office/drawing/2014/main" id="{05004B1F-2EA2-4EC2-8D6E-508ADB9B3669}"/>
               </a:ext>
             </a:extLst>
           </p:cNvPr>
@@ -6236,7 +6236,7 @@
           <p:cNvPr id="15" name="">
             <a:extLst xmlns:a="http://schemas.openxmlformats.org/drawingml/2006/main">
               <a:ext uri="{FF2B5EF4-FFF2-40B4-BE49-F238E27FC236}">
-                <a16:creationId xmlns:a16="http://schemas.microsoft.com/office/drawing/2014/main" id="{65D11D33-4B57-4D99-A39D-EBA4B89C65EF}"/>
+                <a16:creationId xmlns:a16="http://schemas.microsoft.com/office/drawing/2014/main" id="{F807F605-F03C-455E-A006-4A54EF043C98}"/>
               </a:ext>
             </a:extLst>
           </p:cNvPr>
@@ -6268,7 +6268,7 @@
           <p:cNvPr id="16" name="">
             <a:extLst xmlns:a="http://schemas.openxmlformats.org/drawingml/2006/main">
               <a:ext uri="{FF2B5EF4-FFF2-40B4-BE49-F238E27FC236}">
-                <a16:creationId xmlns:a16="http://schemas.microsoft.com/office/drawing/2014/main" id="{9E1AB595-DB22-4254-AB2F-7577F59BCA42}"/>
+                <a16:creationId xmlns:a16="http://schemas.microsoft.com/office/drawing/2014/main" id="{FA7E7E79-BAFE-42B3-9D01-61A4EA38F717}"/>
               </a:ext>
             </a:extLst>
           </p:cNvPr>
@@ -6325,7 +6325,7 @@
           <p:cNvPr id="17" name="">
             <a:extLst xmlns:a="http://schemas.openxmlformats.org/drawingml/2006/main">
               <a:ext uri="{FF2B5EF4-FFF2-40B4-BE49-F238E27FC236}">
-                <a16:creationId xmlns:a16="http://schemas.microsoft.com/office/drawing/2014/main" id="{D28422E1-B2FA-4E85-BC0B-15BDAE45FBDA}"/>
+                <a16:creationId xmlns:a16="http://schemas.microsoft.com/office/drawing/2014/main" id="{CA5BB959-6FF0-4298-B74F-C2920705FC6C}"/>
               </a:ext>
             </a:extLst>
           </p:cNvPr>
@@ -6382,7 +6382,7 @@
           <p:cNvPr id="18" name="">
             <a:extLst xmlns:a="http://schemas.openxmlformats.org/drawingml/2006/main">
               <a:ext uri="{FF2B5EF4-FFF2-40B4-BE49-F238E27FC236}">
-                <a16:creationId xmlns:a16="http://schemas.microsoft.com/office/drawing/2014/main" id="{1DC353BD-5914-49A1-9EAA-808B4AB26B62}"/>
+                <a16:creationId xmlns:a16="http://schemas.microsoft.com/office/drawing/2014/main" id="{1400D608-277B-4E9C-BA62-0FDEE746A9B0}"/>
               </a:ext>
             </a:extLst>
           </p:cNvPr>
@@ -6416,7 +6416,7 @@
           <p:cNvPr id="19" name="">
             <a:extLst xmlns:a="http://schemas.openxmlformats.org/drawingml/2006/main">
               <a:ext uri="{FF2B5EF4-FFF2-40B4-BE49-F238E27FC236}">
-                <a16:creationId xmlns:a16="http://schemas.microsoft.com/office/drawing/2014/main" id="{437EC695-A3B5-4B20-860A-5903CD04D676}"/>
+                <a16:creationId xmlns:a16="http://schemas.microsoft.com/office/drawing/2014/main" id="{9558662D-511F-40CE-892A-7372BCE74477}"/>
               </a:ext>
             </a:extLst>
           </p:cNvPr>
@@ -6448,7 +6448,7 @@
           <p:cNvPr id="20" name="">
             <a:extLst xmlns:a="http://schemas.openxmlformats.org/drawingml/2006/main">
               <a:ext uri="{FF2B5EF4-FFF2-40B4-BE49-F238E27FC236}">
-                <a16:creationId xmlns:a16="http://schemas.microsoft.com/office/drawing/2014/main" id="{2915AC38-DB88-4FD3-AFF7-F758E088717C}"/>
+                <a16:creationId xmlns:a16="http://schemas.microsoft.com/office/drawing/2014/main" id="{07C897D8-78E8-4870-BD95-20935A79AD10}"/>
               </a:ext>
             </a:extLst>
           </p:cNvPr>
@@ -6505,7 +6505,7 @@
           <p:cNvPr id="21" name="">
             <a:extLst xmlns:a="http://schemas.openxmlformats.org/drawingml/2006/main">
               <a:ext uri="{FF2B5EF4-FFF2-40B4-BE49-F238E27FC236}">
-                <a16:creationId xmlns:a16="http://schemas.microsoft.com/office/drawing/2014/main" id="{18967B91-051F-44AE-863D-C4873F91C347}"/>
+                <a16:creationId xmlns:a16="http://schemas.microsoft.com/office/drawing/2014/main" id="{F3BF9DFA-17AD-47FF-9667-8F8CFF618542}"/>
               </a:ext>
             </a:extLst>
           </p:cNvPr>
@@ -6562,7 +6562,7 @@
           <p:cNvPr id="22" name="">
             <a:extLst xmlns:a="http://schemas.openxmlformats.org/drawingml/2006/main">
               <a:ext uri="{FF2B5EF4-FFF2-40B4-BE49-F238E27FC236}">
-                <a16:creationId xmlns:a16="http://schemas.microsoft.com/office/drawing/2014/main" id="{C80EE7EA-347F-42D7-BE7D-4B7F65D618D3}"/>
+                <a16:creationId xmlns:a16="http://schemas.microsoft.com/office/drawing/2014/main" id="{F0C48D8D-D564-4898-8C0B-F3D240AE5D2B}"/>
               </a:ext>
             </a:extLst>
           </p:cNvPr>
@@ -6617,7 +6617,7 @@
     </p:spTree>
     <p:extLst>
       <p:ext uri="{BB962C8B-B14F-4D97-AF65-F5344CB8AC3E}">
-        <p14:creationId xmlns:p14="http://schemas.microsoft.com/office/powerpoint/2010/main" val="964369323"/>
+        <p14:creationId xmlns:p14="http://schemas.microsoft.com/office/powerpoint/2010/main" val="405902427"/>
       </p:ext>
     </p:extLst>
   </p:cSld>
@@ -6818,7 +6818,7 @@
           <p:cNvPr id="16" name="">
             <a:extLst xmlns:a="http://schemas.openxmlformats.org/drawingml/2006/main">
               <a:ext uri="{FF2B5EF4-FFF2-40B4-BE49-F238E27FC236}">
-                <a16:creationId xmlns:a16="http://schemas.microsoft.com/office/drawing/2014/main" id="{808FE29A-EC05-4BCD-B32D-4E14B6B35FB1}"/>
+                <a16:creationId xmlns:a16="http://schemas.microsoft.com/office/drawing/2014/main" id="{7299117D-4BD8-46FE-B0E9-33A416B7AA46}"/>
               </a:ext>
             </a:extLst>
           </p:cNvPr>
@@ -6850,7 +6850,7 @@
           <p:cNvPr id="2" name="">
             <a:extLst xmlns:a="http://schemas.openxmlformats.org/drawingml/2006/main">
               <a:ext uri="{FF2B5EF4-FFF2-40B4-BE49-F238E27FC236}">
-                <a16:creationId xmlns:a16="http://schemas.microsoft.com/office/drawing/2014/main" id="{D692C159-C52B-423E-B43D-AF1D8E295B04}"/>
+                <a16:creationId xmlns:a16="http://schemas.microsoft.com/office/drawing/2014/main" id="{4B408170-E735-4AB2-81B4-187F88F434CE}"/>
               </a:ext>
             </a:extLst>
           </p:cNvPr>
@@ -6907,7 +6907,7 @@
           <p:cNvPr id="3" name="">
             <a:extLst xmlns:a="http://schemas.openxmlformats.org/drawingml/2006/main">
               <a:ext uri="{FF2B5EF4-FFF2-40B4-BE49-F238E27FC236}">
-                <a16:creationId xmlns:a16="http://schemas.microsoft.com/office/drawing/2014/main" id="{76C9D3E0-1213-4786-9E67-90B8E0085BCD}"/>
+                <a16:creationId xmlns:a16="http://schemas.microsoft.com/office/drawing/2014/main" id="{DF96BF23-8A5C-47B2-9C2C-DA451C39E95F}"/>
               </a:ext>
             </a:extLst>
           </p:cNvPr>
@@ -6939,7 +6939,7 @@
           <p:cNvPr id="4" name="">
             <a:extLst xmlns:a="http://schemas.openxmlformats.org/drawingml/2006/main">
               <a:ext uri="{FF2B5EF4-FFF2-40B4-BE49-F238E27FC236}">
-                <a16:creationId xmlns:a16="http://schemas.microsoft.com/office/drawing/2014/main" id="{8EBE403F-58B5-4C09-BB52-5045194F8E79}"/>
+                <a16:creationId xmlns:a16="http://schemas.microsoft.com/office/drawing/2014/main" id="{285912AC-7074-423C-B4AB-C5807F4F3C5A}"/>
               </a:ext>
             </a:extLst>
           </p:cNvPr>
@@ -6996,7 +6996,7 @@
           <p:cNvPr id="5" name="">
             <a:extLst xmlns:a="http://schemas.openxmlformats.org/drawingml/2006/main">
               <a:ext uri="{FF2B5EF4-FFF2-40B4-BE49-F238E27FC236}">
-                <a16:creationId xmlns:a16="http://schemas.microsoft.com/office/drawing/2014/main" id="{C17684A6-6088-4436-B0C8-012C448D090B}"/>
+                <a16:creationId xmlns:a16="http://schemas.microsoft.com/office/drawing/2014/main" id="{0612D9DD-9285-4AEE-A4DC-A1D7AA45846F}"/>
               </a:ext>
             </a:extLst>
           </p:cNvPr>
@@ -7053,7 +7053,7 @@
           <p:cNvPr id="6" name="">
             <a:extLst xmlns:a="http://schemas.openxmlformats.org/drawingml/2006/main">
               <a:ext uri="{FF2B5EF4-FFF2-40B4-BE49-F238E27FC236}">
-                <a16:creationId xmlns:a16="http://schemas.microsoft.com/office/drawing/2014/main" id="{3CF878EE-F159-4888-B877-0900D079E911}"/>
+                <a16:creationId xmlns:a16="http://schemas.microsoft.com/office/drawing/2014/main" id="{2D067C6D-3094-4B76-8338-660C46116472}"/>
               </a:ext>
             </a:extLst>
           </p:cNvPr>
@@ -7110,7 +7110,7 @@
           <p:cNvPr id="7" name="">
             <a:extLst xmlns:a="http://schemas.openxmlformats.org/drawingml/2006/main">
               <a:ext uri="{FF2B5EF4-FFF2-40B4-BE49-F238E27FC236}">
-                <a16:creationId xmlns:a16="http://schemas.microsoft.com/office/drawing/2014/main" id="{B166859F-D407-4808-AC90-2C867D75F3B0}"/>
+                <a16:creationId xmlns:a16="http://schemas.microsoft.com/office/drawing/2014/main" id="{4A0F4881-6622-4D3A-884A-74B9EA980B08}"/>
               </a:ext>
             </a:extLst>
           </p:cNvPr>
@@ -7142,7 +7142,7 @@
           <p:cNvPr id="8" name="">
             <a:extLst xmlns:a="http://schemas.openxmlformats.org/drawingml/2006/main">
               <a:ext uri="{FF2B5EF4-FFF2-40B4-BE49-F238E27FC236}">
-                <a16:creationId xmlns:a16="http://schemas.microsoft.com/office/drawing/2014/main" id="{3F86B74E-BA52-442E-BAD0-D9981A087548}"/>
+                <a16:creationId xmlns:a16="http://schemas.microsoft.com/office/drawing/2014/main" id="{F168D9AA-F72F-4D0B-B138-063915B15465}"/>
               </a:ext>
             </a:extLst>
           </p:cNvPr>
@@ -7199,7 +7199,7 @@
           <p:cNvPr id="9" name="">
             <a:extLst xmlns:a="http://schemas.openxmlformats.org/drawingml/2006/main">
               <a:ext uri="{FF2B5EF4-FFF2-40B4-BE49-F238E27FC236}">
-                <a16:creationId xmlns:a16="http://schemas.microsoft.com/office/drawing/2014/main" id="{A80458CD-5BF4-4E17-B15E-2E7EA320795E}"/>
+                <a16:creationId xmlns:a16="http://schemas.microsoft.com/office/drawing/2014/main" id="{F66513D3-BD45-412B-BEB1-FF5E36AB2861}"/>
               </a:ext>
             </a:extLst>
           </p:cNvPr>
@@ -7256,7 +7256,7 @@
           <p:cNvPr id="10" name="">
             <a:extLst xmlns:a="http://schemas.openxmlformats.org/drawingml/2006/main">
               <a:ext uri="{FF2B5EF4-FFF2-40B4-BE49-F238E27FC236}">
-                <a16:creationId xmlns:a16="http://schemas.microsoft.com/office/drawing/2014/main" id="{5D4AABBC-74F2-4F15-B9AD-222B5E3248D9}"/>
+                <a16:creationId xmlns:a16="http://schemas.microsoft.com/office/drawing/2014/main" id="{5B69E504-DED5-44C7-B0DB-7AD8BBF9F422}"/>
               </a:ext>
             </a:extLst>
           </p:cNvPr>
@@ -7313,7 +7313,7 @@
           <p:cNvPr id="11" name="">
             <a:extLst xmlns:a="http://schemas.openxmlformats.org/drawingml/2006/main">
               <a:ext uri="{FF2B5EF4-FFF2-40B4-BE49-F238E27FC236}">
-                <a16:creationId xmlns:a16="http://schemas.microsoft.com/office/drawing/2014/main" id="{84E3F469-3FC3-46EB-961D-BA79255895BC}"/>
+                <a16:creationId xmlns:a16="http://schemas.microsoft.com/office/drawing/2014/main" id="{8A7F9D87-DE18-4864-B356-94E2BB051B8B}"/>
               </a:ext>
             </a:extLst>
           </p:cNvPr>
@@ -7345,7 +7345,7 @@
           <p:cNvPr id="12" name="">
             <a:extLst xmlns:a="http://schemas.openxmlformats.org/drawingml/2006/main">
               <a:ext uri="{FF2B5EF4-FFF2-40B4-BE49-F238E27FC236}">
-                <a16:creationId xmlns:a16="http://schemas.microsoft.com/office/drawing/2014/main" id="{DF4446AD-650D-434D-B708-677E8F2392E6}"/>
+                <a16:creationId xmlns:a16="http://schemas.microsoft.com/office/drawing/2014/main" id="{6E9DBA80-AF65-4374-BFC1-1A70D945DC64}"/>
               </a:ext>
             </a:extLst>
           </p:cNvPr>
@@ -7402,7 +7402,7 @@
           <p:cNvPr id="13" name="">
             <a:extLst xmlns:a="http://schemas.openxmlformats.org/drawingml/2006/main">
               <a:ext uri="{FF2B5EF4-FFF2-40B4-BE49-F238E27FC236}">
-                <a16:creationId xmlns:a16="http://schemas.microsoft.com/office/drawing/2014/main" id="{28FF3108-3A93-42A6-816A-17BF43C313D0}"/>
+                <a16:creationId xmlns:a16="http://schemas.microsoft.com/office/drawing/2014/main" id="{39FA204F-05D1-42BB-B146-D319E7C96FD1}"/>
               </a:ext>
             </a:extLst>
           </p:cNvPr>
@@ -7459,7 +7459,7 @@
           <p:cNvPr id="14" name="">
             <a:extLst xmlns:a="http://schemas.openxmlformats.org/drawingml/2006/main">
               <a:ext uri="{FF2B5EF4-FFF2-40B4-BE49-F238E27FC236}">
-                <a16:creationId xmlns:a16="http://schemas.microsoft.com/office/drawing/2014/main" id="{CCFE2358-4032-4748-BC37-79B87C2BB176}"/>
+                <a16:creationId xmlns:a16="http://schemas.microsoft.com/office/drawing/2014/main" id="{EFEB6D42-DB77-4FE2-957B-66894C4FC823}"/>
               </a:ext>
             </a:extLst>
           </p:cNvPr>
@@ -7516,7 +7516,7 @@
           <p:cNvPr id="15" name="">
             <a:extLst xmlns:a="http://schemas.openxmlformats.org/drawingml/2006/main">
               <a:ext uri="{FF2B5EF4-FFF2-40B4-BE49-F238E27FC236}">
-                <a16:creationId xmlns:a16="http://schemas.microsoft.com/office/drawing/2014/main" id="{8962780A-8E9F-443C-AE4A-580FFC19529C}"/>
+                <a16:creationId xmlns:a16="http://schemas.microsoft.com/office/drawing/2014/main" id="{90A40F5A-3699-4EB2-812D-07F4622EFFCA}"/>
               </a:ext>
             </a:extLst>
           </p:cNvPr>
@@ -7571,7 +7571,7 @@
     </p:spTree>
     <p:extLst>
       <p:ext uri="{BB962C8B-B14F-4D97-AF65-F5344CB8AC3E}">
-        <p14:creationId xmlns:p14="http://schemas.microsoft.com/office/powerpoint/2010/main" val="2003966326"/>
+        <p14:creationId xmlns:p14="http://schemas.microsoft.com/office/powerpoint/2010/main" val="699599109"/>
       </p:ext>
     </p:extLst>
   </p:cSld>
@@ -7769,10 +7769,10 @@
       </p:grpSpPr>
       <p:sp>
         <p:nvSpPr>
-          <p:cNvPr id="23" name="">
-            <a:extLst xmlns:a="http://schemas.openxmlformats.org/drawingml/2006/main">
-              <a:ext uri="{FF2B5EF4-FFF2-40B4-BE49-F238E27FC236}">
-                <a16:creationId xmlns:a16="http://schemas.microsoft.com/office/drawing/2014/main" id="{7B859E95-C8D6-495B-8BA8-41617C69908D}"/>
+          <p:cNvPr id="26" name="">
+            <a:extLst xmlns:a="http://schemas.openxmlformats.org/drawingml/2006/main">
+              <a:ext uri="{FF2B5EF4-FFF2-40B4-BE49-F238E27FC236}">
+                <a16:creationId xmlns:a16="http://schemas.microsoft.com/office/drawing/2014/main" id="{8C079D80-CC1C-494F-A139-F7F4F2763E86}"/>
               </a:ext>
             </a:extLst>
           </p:cNvPr>
@@ -7804,7 +7804,7 @@
           <p:cNvPr id="2" name="">
             <a:extLst xmlns:a="http://schemas.openxmlformats.org/drawingml/2006/main">
               <a:ext uri="{FF2B5EF4-FFF2-40B4-BE49-F238E27FC236}">
-                <a16:creationId xmlns:a16="http://schemas.microsoft.com/office/drawing/2014/main" id="{5D281ACF-851F-4B21-BA78-942A8F9DA3F7}"/>
+                <a16:creationId xmlns:a16="http://schemas.microsoft.com/office/drawing/2014/main" id="{0832D306-34E9-4A7F-89CC-E2D5481C63A7}"/>
               </a:ext>
             </a:extLst>
           </p:cNvPr>
@@ -7861,7 +7861,7 @@
           <p:cNvPr id="3" name="">
             <a:extLst xmlns:a="http://schemas.openxmlformats.org/drawingml/2006/main">
               <a:ext uri="{FF2B5EF4-FFF2-40B4-BE49-F238E27FC236}">
-                <a16:creationId xmlns:a16="http://schemas.microsoft.com/office/drawing/2014/main" id="{C5628E23-21C5-44E6-8FD4-F8E6958A19B0}"/>
+                <a16:creationId xmlns:a16="http://schemas.microsoft.com/office/drawing/2014/main" id="{DBADC603-D989-4B0D-B02C-4378D570A687}"/>
               </a:ext>
             </a:extLst>
           </p:cNvPr>
@@ -7893,7 +7893,7 @@
           <p:cNvPr id="4" name="">
             <a:extLst xmlns:a="http://schemas.openxmlformats.org/drawingml/2006/main">
               <a:ext uri="{FF2B5EF4-FFF2-40B4-BE49-F238E27FC236}">
-                <a16:creationId xmlns:a16="http://schemas.microsoft.com/office/drawing/2014/main" id="{86089B00-0976-44DD-874E-EF8CF8EE5C96}"/>
+                <a16:creationId xmlns:a16="http://schemas.microsoft.com/office/drawing/2014/main" id="{2ED2E9A9-4640-4E64-8BB5-F3ECB3373B8B}"/>
               </a:ext>
             </a:extLst>
           </p:cNvPr>
@@ -7950,7 +7950,7 @@
           <p:cNvPr id="5" name="">
             <a:extLst xmlns:a="http://schemas.openxmlformats.org/drawingml/2006/main">
               <a:ext uri="{FF2B5EF4-FFF2-40B4-BE49-F238E27FC236}">
-                <a16:creationId xmlns:a16="http://schemas.microsoft.com/office/drawing/2014/main" id="{B1AF82A7-4A50-4562-8510-1B100384A713}"/>
+                <a16:creationId xmlns:a16="http://schemas.microsoft.com/office/drawing/2014/main" id="{325C043D-C31A-4320-A463-5A7B2CEAF060}"/>
               </a:ext>
             </a:extLst>
           </p:cNvPr>
@@ -8007,7 +8007,7 @@
           <p:cNvPr id="6" name="">
             <a:extLst xmlns:a="http://schemas.openxmlformats.org/drawingml/2006/main">
               <a:ext uri="{FF2B5EF4-FFF2-40B4-BE49-F238E27FC236}">
-                <a16:creationId xmlns:a16="http://schemas.microsoft.com/office/drawing/2014/main" id="{C39315F4-7FE6-4E72-B9E5-0000984D5D18}"/>
+                <a16:creationId xmlns:a16="http://schemas.microsoft.com/office/drawing/2014/main" id="{6E78B3B1-4657-4A2D-BA70-9F916C71F288}"/>
               </a:ext>
             </a:extLst>
           </p:cNvPr>
@@ -8064,7 +8064,7 @@
           <p:cNvPr id="7" name="">
             <a:extLst xmlns:a="http://schemas.openxmlformats.org/drawingml/2006/main">
               <a:ext uri="{FF2B5EF4-FFF2-40B4-BE49-F238E27FC236}">
-                <a16:creationId xmlns:a16="http://schemas.microsoft.com/office/drawing/2014/main" id="{13A39764-D80A-4B3C-9C2F-6605870F9B1F}"/>
+                <a16:creationId xmlns:a16="http://schemas.microsoft.com/office/drawing/2014/main" id="{0A1FFFD1-5523-483C-9B5B-6C67E2922473}"/>
               </a:ext>
             </a:extLst>
           </p:cNvPr>
@@ -8096,7 +8096,7 @@
           <p:cNvPr id="8" name="">
             <a:extLst xmlns:a="http://schemas.openxmlformats.org/drawingml/2006/main">
               <a:ext uri="{FF2B5EF4-FFF2-40B4-BE49-F238E27FC236}">
-                <a16:creationId xmlns:a16="http://schemas.microsoft.com/office/drawing/2014/main" id="{2C195A15-519F-4123-9044-E0C0BB239567}"/>
+                <a16:creationId xmlns:a16="http://schemas.microsoft.com/office/drawing/2014/main" id="{AA0AC2F0-C4FB-48EB-85B1-1059B47F8AAF}"/>
               </a:ext>
             </a:extLst>
           </p:cNvPr>
@@ -8153,7 +8153,7 @@
           <p:cNvPr id="9" name="">
             <a:extLst xmlns:a="http://schemas.openxmlformats.org/drawingml/2006/main">
               <a:ext uri="{FF2B5EF4-FFF2-40B4-BE49-F238E27FC236}">
-                <a16:creationId xmlns:a16="http://schemas.microsoft.com/office/drawing/2014/main" id="{C6FD0EAC-20C5-49B5-8A75-46C871310411}"/>
+                <a16:creationId xmlns:a16="http://schemas.microsoft.com/office/drawing/2014/main" id="{A37DEEE6-A342-418F-984D-4C8C552B44E8}"/>
               </a:ext>
             </a:extLst>
           </p:cNvPr>
@@ -8210,19 +8210,19 @@
           <p:cNvPr id="10" name="">
             <a:extLst xmlns:a="http://schemas.openxmlformats.org/drawingml/2006/main">
               <a:ext uri="{FF2B5EF4-FFF2-40B4-BE49-F238E27FC236}">
-                <a16:creationId xmlns:a16="http://schemas.microsoft.com/office/drawing/2014/main" id="{04BACDED-383F-4E79-9BEB-FD895B753C45}"/>
-              </a:ext>
-            </a:extLst>
-          </p:cNvPr>
-          <p:cNvSpPr>
-            <a:spLocks xmlns:a="http://schemas.openxmlformats.org/drawingml/2006/main" noGrp="1"/>
-          </p:cNvSpPr>
-          <p:nvPr/>
-        </p:nvSpPr>
-        <p:spPr>
-          <a:xfrm xmlns:a="http://schemas.openxmlformats.org/drawingml/2006/main">
-            <a:off x="914400" y="1257300"/>
-            <a:ext cx="10363200" cy="781050"/>
+                <a16:creationId xmlns:a16="http://schemas.microsoft.com/office/drawing/2014/main" id="{F7AC3A5E-D2B8-4423-B473-32D3F1776759}"/>
+              </a:ext>
+            </a:extLst>
+          </p:cNvPr>
+          <p:cNvSpPr>
+            <a:spLocks xmlns:a="http://schemas.openxmlformats.org/drawingml/2006/main" noGrp="1"/>
+          </p:cNvSpPr>
+          <p:nvPr/>
+        </p:nvSpPr>
+        <p:spPr>
+          <a:xfrm xmlns:a="http://schemas.openxmlformats.org/drawingml/2006/main">
+            <a:off x="857250" y="1219200"/>
+            <a:ext cx="10477500" cy="742950"/>
           </a:xfrm>
           <a:prstGeom xmlns:a="http://schemas.openxmlformats.org/drawingml/2006/main" prst="rect">
             <a:avLst/>
@@ -8239,7 +8239,7 @@
           <a:lstStyle xmlns:a="http://schemas.openxmlformats.org/drawingml/2006/main"/>
           <a:p xmlns:a="http://schemas.openxmlformats.org/drawingml/2006/main">
             <a:pPr algn="ctr">
-              <a:defRPr sz="2175" b="1">
+              <a:defRPr sz="2100" b="1">
                 <a:solidFill>
                   <a:srgbClr val="17253A"/>
                 </a:solidFill>
@@ -8249,7 +8249,7 @@
               </a:defRPr>
             </a:pPr>
             <a:r>
-              <a:rPr sz="2175" b="1">
+              <a:rPr sz="2100" b="1">
                 <a:solidFill>
                   <a:srgbClr val="17253A"/>
                 </a:solidFill>
@@ -8267,28 +8267,30 @@
           <p:cNvPr id="11" name="">
             <a:extLst xmlns:a="http://schemas.openxmlformats.org/drawingml/2006/main">
               <a:ext uri="{FF2B5EF4-FFF2-40B4-BE49-F238E27FC236}">
-                <a16:creationId xmlns:a16="http://schemas.microsoft.com/office/drawing/2014/main" id="{0A7A66B9-49E3-46DA-BD98-9D70F47290E7}"/>
-              </a:ext>
-            </a:extLst>
-          </p:cNvPr>
-          <p:cNvSpPr>
-            <a:spLocks xmlns:a="http://schemas.openxmlformats.org/drawingml/2006/main" noGrp="1"/>
-          </p:cNvSpPr>
-          <p:nvPr/>
-        </p:nvSpPr>
-        <p:spPr>
-          <a:xfrm xmlns:a="http://schemas.openxmlformats.org/drawingml/2006/main">
-            <a:off x="1000125" y="2247900"/>
-            <a:ext cx="476250" cy="476250"/>
-          </a:xfrm>
-          <a:prstGeom xmlns:a="http://schemas.openxmlformats.org/drawingml/2006/main" prst="ellipse">
+                <a16:creationId xmlns:a16="http://schemas.microsoft.com/office/drawing/2014/main" id="{8906B239-B078-4F69-8A46-33E5DE342E4D}"/>
+              </a:ext>
+            </a:extLst>
+          </p:cNvPr>
+          <p:cNvSpPr>
+            <a:spLocks xmlns:a="http://schemas.openxmlformats.org/drawingml/2006/main" noGrp="1"/>
+          </p:cNvSpPr>
+          <p:nvPr/>
+        </p:nvSpPr>
+        <p:spPr>
+          <a:xfrm xmlns:a="http://schemas.openxmlformats.org/drawingml/2006/main">
+            <a:off x="971550" y="2124075"/>
+            <a:ext cx="38100" cy="3524250"/>
+          </a:xfrm>
+          <a:prstGeom xmlns:a="http://schemas.openxmlformats.org/drawingml/2006/main" prst="rect">
             <a:avLst/>
           </a:prstGeom>
           <a:solidFill xmlns:a="http://schemas.openxmlformats.org/drawingml/2006/main">
-            <a:srgbClr val="18324A"/>
+            <a:srgbClr val="2C6E73"/>
           </a:solidFill>
           <a:ln xmlns:a="http://schemas.openxmlformats.org/drawingml/2006/main" w="0">
-            <a:noFill/>
+            <a:solidFill>
+              <a:srgbClr val="2C6E73"/>
+            </a:solidFill>
           </a:ln>
         </p:spPr>
       </p:sp>
@@ -8297,19 +8299,19 @@
           <p:cNvPr id="12" name="">
             <a:extLst xmlns:a="http://schemas.openxmlformats.org/drawingml/2006/main">
               <a:ext uri="{FF2B5EF4-FFF2-40B4-BE49-F238E27FC236}">
-                <a16:creationId xmlns:a16="http://schemas.microsoft.com/office/drawing/2014/main" id="{85264C72-1C15-444B-B037-A85C7233D858}"/>
-              </a:ext>
-            </a:extLst>
-          </p:cNvPr>
-          <p:cNvSpPr>
-            <a:spLocks xmlns:a="http://schemas.openxmlformats.org/drawingml/2006/main" noGrp="1"/>
-          </p:cNvSpPr>
-          <p:nvPr/>
-        </p:nvSpPr>
-        <p:spPr>
-          <a:xfrm xmlns:a="http://schemas.openxmlformats.org/drawingml/2006/main">
-            <a:off x="1000125" y="2276475"/>
-            <a:ext cx="476250" cy="419100"/>
+                <a16:creationId xmlns:a16="http://schemas.microsoft.com/office/drawing/2014/main" id="{DC5D60B1-ED3C-4F3D-B832-B883BA769BBF}"/>
+              </a:ext>
+            </a:extLst>
+          </p:cNvPr>
+          <p:cNvSpPr>
+            <a:spLocks xmlns:a="http://schemas.openxmlformats.org/drawingml/2006/main" noGrp="1"/>
+          </p:cNvSpPr>
+          <p:nvPr/>
+        </p:nvSpPr>
+        <p:spPr>
+          <a:xfrm xmlns:a="http://schemas.openxmlformats.org/drawingml/2006/main">
+            <a:off x="1162050" y="2200275"/>
+            <a:ext cx="400050" cy="400050"/>
           </a:xfrm>
           <a:prstGeom xmlns:a="http://schemas.openxmlformats.org/drawingml/2006/main" prst="rect">
             <a:avLst/>
@@ -8326,9 +8328,9 @@
           <a:lstStyle xmlns:a="http://schemas.openxmlformats.org/drawingml/2006/main"/>
           <a:p xmlns:a="http://schemas.openxmlformats.org/drawingml/2006/main">
             <a:pPr algn="ctr">
-              <a:defRPr sz="1350" b="1">
-                <a:solidFill>
-                  <a:srgbClr val="FFFFFF"/>
+              <a:defRPr sz="1125" b="1">
+                <a:solidFill>
+                  <a:srgbClr val="2C6E73"/>
                 </a:solidFill>
                 <a:latin typeface="Arial"/>
                 <a:ea typeface="Arial"/>
@@ -8336,9 +8338,9 @@
               </a:defRPr>
             </a:pPr>
             <a:r>
-              <a:rPr sz="1350" b="1">
-                <a:solidFill>
-                  <a:srgbClr val="FFFFFF"/>
+              <a:rPr sz="1125" b="1">
+                <a:solidFill>
+                  <a:srgbClr val="2C6E73"/>
                 </a:solidFill>
                 <a:latin typeface="Arial"/>
                 <a:ea typeface="Arial"/>
@@ -8354,19 +8356,19 @@
           <p:cNvPr id="13" name="">
             <a:extLst xmlns:a="http://schemas.openxmlformats.org/drawingml/2006/main">
               <a:ext uri="{FF2B5EF4-FFF2-40B4-BE49-F238E27FC236}">
-                <a16:creationId xmlns:a16="http://schemas.microsoft.com/office/drawing/2014/main" id="{F5AE7368-AB2F-44ED-839F-3AA7852A4DA3}"/>
-              </a:ext>
-            </a:extLst>
-          </p:cNvPr>
-          <p:cNvSpPr>
-            <a:spLocks xmlns:a="http://schemas.openxmlformats.org/drawingml/2006/main" noGrp="1"/>
-          </p:cNvSpPr>
-          <p:nvPr/>
-        </p:nvSpPr>
-        <p:spPr>
-          <a:xfrm xmlns:a="http://schemas.openxmlformats.org/drawingml/2006/main">
-            <a:off x="1714500" y="2181225"/>
-            <a:ext cx="9429750" cy="609600"/>
+                <a16:creationId xmlns:a16="http://schemas.microsoft.com/office/drawing/2014/main" id="{48A3A1FC-F280-4D5C-A5CB-159123C99568}"/>
+              </a:ext>
+            </a:extLst>
+          </p:cNvPr>
+          <p:cNvSpPr>
+            <a:spLocks xmlns:a="http://schemas.openxmlformats.org/drawingml/2006/main" noGrp="1"/>
+          </p:cNvSpPr>
+          <p:nvPr/>
+        </p:nvSpPr>
+        <p:spPr>
+          <a:xfrm xmlns:a="http://schemas.openxmlformats.org/drawingml/2006/main">
+            <a:off x="1714500" y="2114550"/>
+            <a:ext cx="9525000" cy="638175"/>
           </a:xfrm>
           <a:prstGeom xmlns:a="http://schemas.openxmlformats.org/drawingml/2006/main" prst="rect">
             <a:avLst/>
@@ -8383,7 +8385,7 @@
           <a:lstStyle xmlns:a="http://schemas.openxmlformats.org/drawingml/2006/main"/>
           <a:p xmlns:a="http://schemas.openxmlformats.org/drawingml/2006/main">
             <a:pPr algn="l">
-              <a:defRPr sz="1500" b="0">
+              <a:defRPr sz="1575" b="0">
                 <a:solidFill>
                   <a:srgbClr val="17253A"/>
                 </a:solidFill>
@@ -8393,7 +8395,7 @@
               </a:defRPr>
             </a:pPr>
             <a:r>
-              <a:rPr sz="1500" b="0">
+              <a:rPr sz="1575" b="0">
                 <a:solidFill>
                   <a:srgbClr val="17253A"/>
                 </a:solidFill>
@@ -8401,7 +8403,7 @@
                 <a:ea typeface="Arial"/>
                 <a:cs typeface="Arial"/>
               </a:rPr>
-              <a:t>Identify the structure: Find a useful percentage such as 10%, 5% or 1%.</a:t>
+              <a:t>15% of £240</a:t>
             </a:r>
           </a:p>
         </p:txBody>
@@ -8411,28 +8413,30 @@
           <p:cNvPr id="14" name="">
             <a:extLst xmlns:a="http://schemas.openxmlformats.org/drawingml/2006/main">
               <a:ext uri="{FF2B5EF4-FFF2-40B4-BE49-F238E27FC236}">
-                <a16:creationId xmlns:a16="http://schemas.microsoft.com/office/drawing/2014/main" id="{B7C0F7DC-5CD8-488A-9447-35A474843053}"/>
-              </a:ext>
-            </a:extLst>
-          </p:cNvPr>
-          <p:cNvSpPr>
-            <a:spLocks xmlns:a="http://schemas.openxmlformats.org/drawingml/2006/main" noGrp="1"/>
-          </p:cNvSpPr>
-          <p:nvPr/>
-        </p:nvSpPr>
-        <p:spPr>
-          <a:xfrm xmlns:a="http://schemas.openxmlformats.org/drawingml/2006/main">
-            <a:off x="1000125" y="2990850"/>
-            <a:ext cx="476250" cy="476250"/>
-          </a:xfrm>
-          <a:prstGeom xmlns:a="http://schemas.openxmlformats.org/drawingml/2006/main" prst="ellipse">
+                <a16:creationId xmlns:a16="http://schemas.microsoft.com/office/drawing/2014/main" id="{C7063195-0108-44E3-9C11-EAD99B94E55F}"/>
+              </a:ext>
+            </a:extLst>
+          </p:cNvPr>
+          <p:cNvSpPr>
+            <a:spLocks xmlns:a="http://schemas.openxmlformats.org/drawingml/2006/main" noGrp="1"/>
+          </p:cNvSpPr>
+          <p:nvPr/>
+        </p:nvSpPr>
+        <p:spPr>
+          <a:xfrm xmlns:a="http://schemas.openxmlformats.org/drawingml/2006/main">
+            <a:off x="1714500" y="2771775"/>
+            <a:ext cx="9334500" cy="9525"/>
+          </a:xfrm>
+          <a:prstGeom xmlns:a="http://schemas.openxmlformats.org/drawingml/2006/main" prst="rect">
             <a:avLst/>
           </a:prstGeom>
           <a:solidFill xmlns:a="http://schemas.openxmlformats.org/drawingml/2006/main">
-            <a:srgbClr val="2C6E73"/>
+            <a:srgbClr val="D9E0E6"/>
           </a:solidFill>
           <a:ln xmlns:a="http://schemas.openxmlformats.org/drawingml/2006/main" w="0">
-            <a:noFill/>
+            <a:solidFill>
+              <a:srgbClr val="D9E0E6"/>
+            </a:solidFill>
           </a:ln>
         </p:spPr>
       </p:sp>
@@ -8441,19 +8445,19 @@
           <p:cNvPr id="15" name="">
             <a:extLst xmlns:a="http://schemas.openxmlformats.org/drawingml/2006/main">
               <a:ext uri="{FF2B5EF4-FFF2-40B4-BE49-F238E27FC236}">
-                <a16:creationId xmlns:a16="http://schemas.microsoft.com/office/drawing/2014/main" id="{08773B6F-454B-44BA-8161-CC6F66A5C77E}"/>
-              </a:ext>
-            </a:extLst>
-          </p:cNvPr>
-          <p:cNvSpPr>
-            <a:spLocks xmlns:a="http://schemas.openxmlformats.org/drawingml/2006/main" noGrp="1"/>
-          </p:cNvSpPr>
-          <p:nvPr/>
-        </p:nvSpPr>
-        <p:spPr>
-          <a:xfrm xmlns:a="http://schemas.openxmlformats.org/drawingml/2006/main">
-            <a:off x="1000125" y="3019425"/>
-            <a:ext cx="476250" cy="419100"/>
+                <a16:creationId xmlns:a16="http://schemas.microsoft.com/office/drawing/2014/main" id="{09A7FC35-C817-4D61-9BD4-144B282861F1}"/>
+              </a:ext>
+            </a:extLst>
+          </p:cNvPr>
+          <p:cNvSpPr>
+            <a:spLocks xmlns:a="http://schemas.openxmlformats.org/drawingml/2006/main" noGrp="1"/>
+          </p:cNvSpPr>
+          <p:nvPr/>
+        </p:nvSpPr>
+        <p:spPr>
+          <a:xfrm xmlns:a="http://schemas.openxmlformats.org/drawingml/2006/main">
+            <a:off x="1162050" y="2905125"/>
+            <a:ext cx="400050" cy="400050"/>
           </a:xfrm>
           <a:prstGeom xmlns:a="http://schemas.openxmlformats.org/drawingml/2006/main" prst="rect">
             <a:avLst/>
@@ -8470,9 +8474,9 @@
           <a:lstStyle xmlns:a="http://schemas.openxmlformats.org/drawingml/2006/main"/>
           <a:p xmlns:a="http://schemas.openxmlformats.org/drawingml/2006/main">
             <a:pPr algn="ctr">
-              <a:defRPr sz="1350" b="1">
-                <a:solidFill>
-                  <a:srgbClr val="FFFFFF"/>
+              <a:defRPr sz="1125" b="1">
+                <a:solidFill>
+                  <a:srgbClr val="2C6E73"/>
                 </a:solidFill>
                 <a:latin typeface="Arial"/>
                 <a:ea typeface="Arial"/>
@@ -8480,9 +8484,9 @@
               </a:defRPr>
             </a:pPr>
             <a:r>
-              <a:rPr sz="1350" b="1">
-                <a:solidFill>
-                  <a:srgbClr val="FFFFFF"/>
+              <a:rPr sz="1125" b="1">
+                <a:solidFill>
+                  <a:srgbClr val="2C6E73"/>
                 </a:solidFill>
                 <a:latin typeface="Arial"/>
                 <a:ea typeface="Arial"/>
@@ -8498,19 +8502,19 @@
           <p:cNvPr id="16" name="">
             <a:extLst xmlns:a="http://schemas.openxmlformats.org/drawingml/2006/main">
               <a:ext uri="{FF2B5EF4-FFF2-40B4-BE49-F238E27FC236}">
-                <a16:creationId xmlns:a16="http://schemas.microsoft.com/office/drawing/2014/main" id="{6AEAD21D-92CF-4ED2-92FB-147ED4483E41}"/>
-              </a:ext>
-            </a:extLst>
-          </p:cNvPr>
-          <p:cNvSpPr>
-            <a:spLocks xmlns:a="http://schemas.openxmlformats.org/drawingml/2006/main" noGrp="1"/>
-          </p:cNvSpPr>
-          <p:nvPr/>
-        </p:nvSpPr>
-        <p:spPr>
-          <a:xfrm xmlns:a="http://schemas.openxmlformats.org/drawingml/2006/main">
-            <a:off x="1714500" y="2924175"/>
-            <a:ext cx="9429750" cy="609600"/>
+                <a16:creationId xmlns:a16="http://schemas.microsoft.com/office/drawing/2014/main" id="{0474B598-8700-446D-A2B4-ED988851B408}"/>
+              </a:ext>
+            </a:extLst>
+          </p:cNvPr>
+          <p:cNvSpPr>
+            <a:spLocks xmlns:a="http://schemas.openxmlformats.org/drawingml/2006/main" noGrp="1"/>
+          </p:cNvSpPr>
+          <p:nvPr/>
+        </p:nvSpPr>
+        <p:spPr>
+          <a:xfrm xmlns:a="http://schemas.openxmlformats.org/drawingml/2006/main">
+            <a:off x="1714500" y="2819400"/>
+            <a:ext cx="9525000" cy="638175"/>
           </a:xfrm>
           <a:prstGeom xmlns:a="http://schemas.openxmlformats.org/drawingml/2006/main" prst="rect">
             <a:avLst/>
@@ -8527,7 +8531,7 @@
           <a:lstStyle xmlns:a="http://schemas.openxmlformats.org/drawingml/2006/main"/>
           <a:p xmlns:a="http://schemas.openxmlformats.org/drawingml/2006/main">
             <a:pPr algn="l">
-              <a:defRPr sz="1500" b="0">
+              <a:defRPr sz="1575" b="0">
                 <a:solidFill>
                   <a:srgbClr val="17253A"/>
                 </a:solidFill>
@@ -8537,7 +8541,7 @@
               </a:defRPr>
             </a:pPr>
             <a:r>
-              <a:rPr sz="1500" b="0">
+              <a:rPr sz="1575" b="0">
                 <a:solidFill>
                   <a:srgbClr val="17253A"/>
                 </a:solidFill>
@@ -8545,7 +8549,7 @@
                 <a:ea typeface="Arial"/>
                 <a:cs typeface="Arial"/>
               </a:rPr>
-              <a:t>Set up the method: Combine or scale the known percentage to reach the required value.</a:t>
+              <a:t>10% = £24     5% = £12</a:t>
             </a:r>
           </a:p>
         </p:txBody>
@@ -8555,28 +8559,30 @@
           <p:cNvPr id="17" name="">
             <a:extLst xmlns:a="http://schemas.openxmlformats.org/drawingml/2006/main">
               <a:ext uri="{FF2B5EF4-FFF2-40B4-BE49-F238E27FC236}">
-                <a16:creationId xmlns:a16="http://schemas.microsoft.com/office/drawing/2014/main" id="{9598861B-6A37-4116-9AF5-4EE83C870CEE}"/>
-              </a:ext>
-            </a:extLst>
-          </p:cNvPr>
-          <p:cNvSpPr>
-            <a:spLocks xmlns:a="http://schemas.openxmlformats.org/drawingml/2006/main" noGrp="1"/>
-          </p:cNvSpPr>
-          <p:nvPr/>
-        </p:nvSpPr>
-        <p:spPr>
-          <a:xfrm xmlns:a="http://schemas.openxmlformats.org/drawingml/2006/main">
-            <a:off x="1000125" y="3733800"/>
-            <a:ext cx="476250" cy="476250"/>
-          </a:xfrm>
-          <a:prstGeom xmlns:a="http://schemas.openxmlformats.org/drawingml/2006/main" prst="ellipse">
+                <a16:creationId xmlns:a16="http://schemas.microsoft.com/office/drawing/2014/main" id="{569D2372-1875-4144-BEE2-69138EE498D0}"/>
+              </a:ext>
+            </a:extLst>
+          </p:cNvPr>
+          <p:cNvSpPr>
+            <a:spLocks xmlns:a="http://schemas.openxmlformats.org/drawingml/2006/main" noGrp="1"/>
+          </p:cNvSpPr>
+          <p:nvPr/>
+        </p:nvSpPr>
+        <p:spPr>
+          <a:xfrm xmlns:a="http://schemas.openxmlformats.org/drawingml/2006/main">
+            <a:off x="1714500" y="3476625"/>
+            <a:ext cx="9334500" cy="9525"/>
+          </a:xfrm>
+          <a:prstGeom xmlns:a="http://schemas.openxmlformats.org/drawingml/2006/main" prst="rect">
             <a:avLst/>
           </a:prstGeom>
           <a:solidFill xmlns:a="http://schemas.openxmlformats.org/drawingml/2006/main">
-            <a:srgbClr val="2C6E73"/>
+            <a:srgbClr val="D9E0E6"/>
           </a:solidFill>
           <a:ln xmlns:a="http://schemas.openxmlformats.org/drawingml/2006/main" w="0">
-            <a:noFill/>
+            <a:solidFill>
+              <a:srgbClr val="D9E0E6"/>
+            </a:solidFill>
           </a:ln>
         </p:spPr>
       </p:sp>
@@ -8585,19 +8591,19 @@
           <p:cNvPr id="18" name="">
             <a:extLst xmlns:a="http://schemas.openxmlformats.org/drawingml/2006/main">
               <a:ext uri="{FF2B5EF4-FFF2-40B4-BE49-F238E27FC236}">
-                <a16:creationId xmlns:a16="http://schemas.microsoft.com/office/drawing/2014/main" id="{9A21F444-3C26-4799-B78E-451F23F909ED}"/>
-              </a:ext>
-            </a:extLst>
-          </p:cNvPr>
-          <p:cNvSpPr>
-            <a:spLocks xmlns:a="http://schemas.openxmlformats.org/drawingml/2006/main" noGrp="1"/>
-          </p:cNvSpPr>
-          <p:nvPr/>
-        </p:nvSpPr>
-        <p:spPr>
-          <a:xfrm xmlns:a="http://schemas.openxmlformats.org/drawingml/2006/main">
-            <a:off x="1000125" y="3762375"/>
-            <a:ext cx="476250" cy="419100"/>
+                <a16:creationId xmlns:a16="http://schemas.microsoft.com/office/drawing/2014/main" id="{E6B7339B-F515-4A9E-A568-2FBD5D2C7058}"/>
+              </a:ext>
+            </a:extLst>
+          </p:cNvPr>
+          <p:cNvSpPr>
+            <a:spLocks xmlns:a="http://schemas.openxmlformats.org/drawingml/2006/main" noGrp="1"/>
+          </p:cNvSpPr>
+          <p:nvPr/>
+        </p:nvSpPr>
+        <p:spPr>
+          <a:xfrm xmlns:a="http://schemas.openxmlformats.org/drawingml/2006/main">
+            <a:off x="1162050" y="3609975"/>
+            <a:ext cx="400050" cy="400050"/>
           </a:xfrm>
           <a:prstGeom xmlns:a="http://schemas.openxmlformats.org/drawingml/2006/main" prst="rect">
             <a:avLst/>
@@ -8614,9 +8620,9 @@
           <a:lstStyle xmlns:a="http://schemas.openxmlformats.org/drawingml/2006/main"/>
           <a:p xmlns:a="http://schemas.openxmlformats.org/drawingml/2006/main">
             <a:pPr algn="ctr">
-              <a:defRPr sz="1350" b="1">
-                <a:solidFill>
-                  <a:srgbClr val="FFFFFF"/>
+              <a:defRPr sz="1125" b="1">
+                <a:solidFill>
+                  <a:srgbClr val="2C6E73"/>
                 </a:solidFill>
                 <a:latin typeface="Arial"/>
                 <a:ea typeface="Arial"/>
@@ -8624,9 +8630,9 @@
               </a:defRPr>
             </a:pPr>
             <a:r>
-              <a:rPr sz="1350" b="1">
-                <a:solidFill>
-                  <a:srgbClr val="FFFFFF"/>
+              <a:rPr sz="1125" b="1">
+                <a:solidFill>
+                  <a:srgbClr val="2C6E73"/>
                 </a:solidFill>
                 <a:latin typeface="Arial"/>
                 <a:ea typeface="Arial"/>
@@ -8642,19 +8648,19 @@
           <p:cNvPr id="19" name="">
             <a:extLst xmlns:a="http://schemas.openxmlformats.org/drawingml/2006/main">
               <a:ext uri="{FF2B5EF4-FFF2-40B4-BE49-F238E27FC236}">
-                <a16:creationId xmlns:a16="http://schemas.microsoft.com/office/drawing/2014/main" id="{03E8D36C-494A-45F5-AC75-20AC0137DAD4}"/>
-              </a:ext>
-            </a:extLst>
-          </p:cNvPr>
-          <p:cNvSpPr>
-            <a:spLocks xmlns:a="http://schemas.openxmlformats.org/drawingml/2006/main" noGrp="1"/>
-          </p:cNvSpPr>
-          <p:nvPr/>
-        </p:nvSpPr>
-        <p:spPr>
-          <a:xfrm xmlns:a="http://schemas.openxmlformats.org/drawingml/2006/main">
-            <a:off x="1714500" y="3667125"/>
-            <a:ext cx="9429750" cy="609600"/>
+                <a16:creationId xmlns:a16="http://schemas.microsoft.com/office/drawing/2014/main" id="{032A9EAE-E76A-41D2-9CB8-0AB370B0A641}"/>
+              </a:ext>
+            </a:extLst>
+          </p:cNvPr>
+          <p:cNvSpPr>
+            <a:spLocks xmlns:a="http://schemas.openxmlformats.org/drawingml/2006/main" noGrp="1"/>
+          </p:cNvSpPr>
+          <p:nvPr/>
+        </p:nvSpPr>
+        <p:spPr>
+          <a:xfrm xmlns:a="http://schemas.openxmlformats.org/drawingml/2006/main">
+            <a:off x="1714500" y="3524250"/>
+            <a:ext cx="9525000" cy="638175"/>
           </a:xfrm>
           <a:prstGeom xmlns:a="http://schemas.openxmlformats.org/drawingml/2006/main" prst="rect">
             <a:avLst/>
@@ -8671,7 +8677,7 @@
           <a:lstStyle xmlns:a="http://schemas.openxmlformats.org/drawingml/2006/main"/>
           <a:p xmlns:a="http://schemas.openxmlformats.org/drawingml/2006/main">
             <a:pPr algn="l">
-              <a:defRPr sz="1500" b="0">
+              <a:defRPr sz="1575" b="0">
                 <a:solidFill>
                   <a:srgbClr val="17253A"/>
                 </a:solidFill>
@@ -8681,7 +8687,7 @@
               </a:defRPr>
             </a:pPr>
             <a:r>
-              <a:rPr sz="1500" b="0">
+              <a:rPr sz="1575" b="0">
                 <a:solidFill>
                   <a:srgbClr val="17253A"/>
                 </a:solidFill>
@@ -8689,7 +8695,7 @@
                 <a:ea typeface="Arial"/>
                 <a:cs typeface="Arial"/>
               </a:rPr>
-              <a:t>Complete the calculation: £204.</a:t>
+              <a:t>Discount = £24 + £12 = £36</a:t>
             </a:r>
           </a:p>
         </p:txBody>
@@ -8699,28 +8705,30 @@
           <p:cNvPr id="20" name="">
             <a:extLst xmlns:a="http://schemas.openxmlformats.org/drawingml/2006/main">
               <a:ext uri="{FF2B5EF4-FFF2-40B4-BE49-F238E27FC236}">
-                <a16:creationId xmlns:a16="http://schemas.microsoft.com/office/drawing/2014/main" id="{6E7EA75C-A8F8-411E-9047-7D8D1510C2C4}"/>
-              </a:ext>
-            </a:extLst>
-          </p:cNvPr>
-          <p:cNvSpPr>
-            <a:spLocks xmlns:a="http://schemas.openxmlformats.org/drawingml/2006/main" noGrp="1"/>
-          </p:cNvSpPr>
-          <p:nvPr/>
-        </p:nvSpPr>
-        <p:spPr>
-          <a:xfrm xmlns:a="http://schemas.openxmlformats.org/drawingml/2006/main">
-            <a:off x="1000125" y="4476750"/>
-            <a:ext cx="476250" cy="476250"/>
-          </a:xfrm>
-          <a:prstGeom xmlns:a="http://schemas.openxmlformats.org/drawingml/2006/main" prst="ellipse">
+                <a16:creationId xmlns:a16="http://schemas.microsoft.com/office/drawing/2014/main" id="{A000CEE7-D1C5-4D3B-BFD9-56ABD7309440}"/>
+              </a:ext>
+            </a:extLst>
+          </p:cNvPr>
+          <p:cNvSpPr>
+            <a:spLocks xmlns:a="http://schemas.openxmlformats.org/drawingml/2006/main" noGrp="1"/>
+          </p:cNvSpPr>
+          <p:nvPr/>
+        </p:nvSpPr>
+        <p:spPr>
+          <a:xfrm xmlns:a="http://schemas.openxmlformats.org/drawingml/2006/main">
+            <a:off x="1714500" y="4181475"/>
+            <a:ext cx="9334500" cy="9525"/>
+          </a:xfrm>
+          <a:prstGeom xmlns:a="http://schemas.openxmlformats.org/drawingml/2006/main" prst="rect">
             <a:avLst/>
           </a:prstGeom>
           <a:solidFill xmlns:a="http://schemas.openxmlformats.org/drawingml/2006/main">
-            <a:srgbClr val="2C6E73"/>
+            <a:srgbClr val="D9E0E6"/>
           </a:solidFill>
           <a:ln xmlns:a="http://schemas.openxmlformats.org/drawingml/2006/main" w="0">
-            <a:noFill/>
+            <a:solidFill>
+              <a:srgbClr val="D9E0E6"/>
+            </a:solidFill>
           </a:ln>
         </p:spPr>
       </p:sp>
@@ -8729,19 +8737,19 @@
           <p:cNvPr id="21" name="">
             <a:extLst xmlns:a="http://schemas.openxmlformats.org/drawingml/2006/main">
               <a:ext uri="{FF2B5EF4-FFF2-40B4-BE49-F238E27FC236}">
-                <a16:creationId xmlns:a16="http://schemas.microsoft.com/office/drawing/2014/main" id="{548B1A54-DD31-44E6-A777-F4EFE6AD7E7E}"/>
-              </a:ext>
-            </a:extLst>
-          </p:cNvPr>
-          <p:cNvSpPr>
-            <a:spLocks xmlns:a="http://schemas.openxmlformats.org/drawingml/2006/main" noGrp="1"/>
-          </p:cNvSpPr>
-          <p:nvPr/>
-        </p:nvSpPr>
-        <p:spPr>
-          <a:xfrm xmlns:a="http://schemas.openxmlformats.org/drawingml/2006/main">
-            <a:off x="1000125" y="4505325"/>
-            <a:ext cx="476250" cy="419100"/>
+                <a16:creationId xmlns:a16="http://schemas.microsoft.com/office/drawing/2014/main" id="{EE1CC3C2-DBF5-4C90-A658-93544F46DA19}"/>
+              </a:ext>
+            </a:extLst>
+          </p:cNvPr>
+          <p:cNvSpPr>
+            <a:spLocks xmlns:a="http://schemas.openxmlformats.org/drawingml/2006/main" noGrp="1"/>
+          </p:cNvSpPr>
+          <p:nvPr/>
+        </p:nvSpPr>
+        <p:spPr>
+          <a:xfrm xmlns:a="http://schemas.openxmlformats.org/drawingml/2006/main">
+            <a:off x="1162050" y="4314825"/>
+            <a:ext cx="400050" cy="400050"/>
           </a:xfrm>
           <a:prstGeom xmlns:a="http://schemas.openxmlformats.org/drawingml/2006/main" prst="rect">
             <a:avLst/>
@@ -8758,9 +8766,9 @@
           <a:lstStyle xmlns:a="http://schemas.openxmlformats.org/drawingml/2006/main"/>
           <a:p xmlns:a="http://schemas.openxmlformats.org/drawingml/2006/main">
             <a:pPr algn="ctr">
-              <a:defRPr sz="1350" b="1">
-                <a:solidFill>
-                  <a:srgbClr val="FFFFFF"/>
+              <a:defRPr sz="1125" b="1">
+                <a:solidFill>
+                  <a:srgbClr val="2C6E73"/>
                 </a:solidFill>
                 <a:latin typeface="Arial"/>
                 <a:ea typeface="Arial"/>
@@ -8768,9 +8776,9 @@
               </a:defRPr>
             </a:pPr>
             <a:r>
-              <a:rPr sz="1350" b="1">
-                <a:solidFill>
-                  <a:srgbClr val="FFFFFF"/>
+              <a:rPr sz="1125" b="1">
+                <a:solidFill>
+                  <a:srgbClr val="2C6E73"/>
                 </a:solidFill>
                 <a:latin typeface="Arial"/>
                 <a:ea typeface="Arial"/>
@@ -8786,19 +8794,19 @@
           <p:cNvPr id="22" name="">
             <a:extLst xmlns:a="http://schemas.openxmlformats.org/drawingml/2006/main">
               <a:ext uri="{FF2B5EF4-FFF2-40B4-BE49-F238E27FC236}">
-                <a16:creationId xmlns:a16="http://schemas.microsoft.com/office/drawing/2014/main" id="{786538CC-535F-4788-A405-46B130B106E3}"/>
-              </a:ext>
-            </a:extLst>
-          </p:cNvPr>
-          <p:cNvSpPr>
-            <a:spLocks xmlns:a="http://schemas.openxmlformats.org/drawingml/2006/main" noGrp="1"/>
-          </p:cNvSpPr>
-          <p:nvPr/>
-        </p:nvSpPr>
-        <p:spPr>
-          <a:xfrm xmlns:a="http://schemas.openxmlformats.org/drawingml/2006/main">
-            <a:off x="1714500" y="4410075"/>
-            <a:ext cx="9429750" cy="609600"/>
+                <a16:creationId xmlns:a16="http://schemas.microsoft.com/office/drawing/2014/main" id="{00BD9455-09DB-4A3E-9FA9-B910A77C0723}"/>
+              </a:ext>
+            </a:extLst>
+          </p:cNvPr>
+          <p:cNvSpPr>
+            <a:spLocks xmlns:a="http://schemas.openxmlformats.org/drawingml/2006/main" noGrp="1"/>
+          </p:cNvSpPr>
+          <p:nvPr/>
+        </p:nvSpPr>
+        <p:spPr>
+          <a:xfrm xmlns:a="http://schemas.openxmlformats.org/drawingml/2006/main">
+            <a:off x="1714500" y="4229100"/>
+            <a:ext cx="9525000" cy="638175"/>
           </a:xfrm>
           <a:prstGeom xmlns:a="http://schemas.openxmlformats.org/drawingml/2006/main" prst="rect">
             <a:avLst/>
@@ -8815,9 +8823,9 @@
           <a:lstStyle xmlns:a="http://schemas.openxmlformats.org/drawingml/2006/main"/>
           <a:p xmlns:a="http://schemas.openxmlformats.org/drawingml/2006/main">
             <a:pPr algn="l">
-              <a:defRPr sz="1500" b="1">
-                <a:solidFill>
-                  <a:srgbClr val="2F785D"/>
+              <a:defRPr sz="1575" b="0">
+                <a:solidFill>
+                  <a:srgbClr val="17253A"/>
                 </a:solidFill>
                 <a:latin typeface="Arial"/>
                 <a:ea typeface="Arial"/>
@@ -8825,15 +8833,161 @@
               </a:defRPr>
             </a:pPr>
             <a:r>
-              <a:rPr sz="1500" b="1">
+              <a:rPr sz="1575" b="0">
+                <a:solidFill>
+                  <a:srgbClr val="17253A"/>
+                </a:solidFill>
+                <a:latin typeface="Arial"/>
+                <a:ea typeface="Arial"/>
+                <a:cs typeface="Arial"/>
+              </a:rPr>
+              <a:t>£240 - £36</a:t>
+            </a:r>
+          </a:p>
+        </p:txBody>
+      </p:sp>
+      <p:sp>
+        <p:nvSpPr>
+          <p:cNvPr id="23" name="">
+            <a:extLst xmlns:a="http://schemas.openxmlformats.org/drawingml/2006/main">
+              <a:ext uri="{FF2B5EF4-FFF2-40B4-BE49-F238E27FC236}">
+                <a16:creationId xmlns:a16="http://schemas.microsoft.com/office/drawing/2014/main" id="{860FB506-BE07-49AD-A1F5-13BEBC1279EE}"/>
+              </a:ext>
+            </a:extLst>
+          </p:cNvPr>
+          <p:cNvSpPr>
+            <a:spLocks xmlns:a="http://schemas.openxmlformats.org/drawingml/2006/main" noGrp="1"/>
+          </p:cNvSpPr>
+          <p:nvPr/>
+        </p:nvSpPr>
+        <p:spPr>
+          <a:xfrm xmlns:a="http://schemas.openxmlformats.org/drawingml/2006/main">
+            <a:off x="1714500" y="4886325"/>
+            <a:ext cx="9334500" cy="9525"/>
+          </a:xfrm>
+          <a:prstGeom xmlns:a="http://schemas.openxmlformats.org/drawingml/2006/main" prst="rect">
+            <a:avLst/>
+          </a:prstGeom>
+          <a:solidFill xmlns:a="http://schemas.openxmlformats.org/drawingml/2006/main">
+            <a:srgbClr val="D9E0E6"/>
+          </a:solidFill>
+          <a:ln xmlns:a="http://schemas.openxmlformats.org/drawingml/2006/main" w="0">
+            <a:solidFill>
+              <a:srgbClr val="D9E0E6"/>
+            </a:solidFill>
+          </a:ln>
+        </p:spPr>
+      </p:sp>
+      <p:sp>
+        <p:nvSpPr>
+          <p:cNvPr id="24" name="">
+            <a:extLst xmlns:a="http://schemas.openxmlformats.org/drawingml/2006/main">
+              <a:ext uri="{FF2B5EF4-FFF2-40B4-BE49-F238E27FC236}">
+                <a16:creationId xmlns:a16="http://schemas.microsoft.com/office/drawing/2014/main" id="{A3CF1ED9-38C9-4473-B857-5114FC38FE10}"/>
+              </a:ext>
+            </a:extLst>
+          </p:cNvPr>
+          <p:cNvSpPr>
+            <a:spLocks xmlns:a="http://schemas.openxmlformats.org/drawingml/2006/main" noGrp="1"/>
+          </p:cNvSpPr>
+          <p:nvPr/>
+        </p:nvSpPr>
+        <p:spPr>
+          <a:xfrm xmlns:a="http://schemas.openxmlformats.org/drawingml/2006/main">
+            <a:off x="1162050" y="5019675"/>
+            <a:ext cx="400050" cy="400050"/>
+          </a:xfrm>
+          <a:prstGeom xmlns:a="http://schemas.openxmlformats.org/drawingml/2006/main" prst="rect">
+            <a:avLst/>
+          </a:prstGeom>
+          <a:noFill xmlns:a="http://schemas.openxmlformats.org/drawingml/2006/main"/>
+          <a:ln xmlns:a="http://schemas.openxmlformats.org/drawingml/2006/main" w="0">
+            <a:noFill/>
+          </a:ln>
+        </p:spPr>
+        <p:txBody>
+          <a:bodyPr xmlns:a="http://schemas.openxmlformats.org/drawingml/2006/main" anchor="ctr">
+            <a:normAutofit fontScale="100000"/>
+          </a:bodyPr>
+          <a:lstStyle xmlns:a="http://schemas.openxmlformats.org/drawingml/2006/main"/>
+          <a:p xmlns:a="http://schemas.openxmlformats.org/drawingml/2006/main">
+            <a:pPr algn="ctr">
+              <a:defRPr sz="1125" b="1">
                 <a:solidFill>
                   <a:srgbClr val="2F785D"/>
                 </a:solidFill>
                 <a:latin typeface="Arial"/>
                 <a:ea typeface="Arial"/>
                 <a:cs typeface="Arial"/>
+              </a:defRPr>
+            </a:pPr>
+            <a:r>
+              <a:rPr sz="1125" b="1">
+                <a:solidFill>
+                  <a:srgbClr val="2F785D"/>
+                </a:solidFill>
+                <a:latin typeface="Arial"/>
+                <a:ea typeface="Arial"/>
+                <a:cs typeface="Arial"/>
               </a:rPr>
-              <a:t>Check the result: Check the result against the whole amount and context.</a:t>
+              <a:t>5</a:t>
+            </a:r>
+          </a:p>
+        </p:txBody>
+      </p:sp>
+      <p:sp>
+        <p:nvSpPr>
+          <p:cNvPr id="25" name="">
+            <a:extLst xmlns:a="http://schemas.openxmlformats.org/drawingml/2006/main">
+              <a:ext uri="{FF2B5EF4-FFF2-40B4-BE49-F238E27FC236}">
+                <a16:creationId xmlns:a16="http://schemas.microsoft.com/office/drawing/2014/main" id="{CC42CBE9-45E7-464F-BA6F-0607052AA671}"/>
+              </a:ext>
+            </a:extLst>
+          </p:cNvPr>
+          <p:cNvSpPr>
+            <a:spLocks xmlns:a="http://schemas.openxmlformats.org/drawingml/2006/main" noGrp="1"/>
+          </p:cNvSpPr>
+          <p:nvPr/>
+        </p:nvSpPr>
+        <p:spPr>
+          <a:xfrm xmlns:a="http://schemas.openxmlformats.org/drawingml/2006/main">
+            <a:off x="1714500" y="4933950"/>
+            <a:ext cx="9525000" cy="638175"/>
+          </a:xfrm>
+          <a:prstGeom xmlns:a="http://schemas.openxmlformats.org/drawingml/2006/main" prst="rect">
+            <a:avLst/>
+          </a:prstGeom>
+          <a:noFill xmlns:a="http://schemas.openxmlformats.org/drawingml/2006/main"/>
+          <a:ln xmlns:a="http://schemas.openxmlformats.org/drawingml/2006/main" w="0">
+            <a:noFill/>
+          </a:ln>
+        </p:spPr>
+        <p:txBody>
+          <a:bodyPr xmlns:a="http://schemas.openxmlformats.org/drawingml/2006/main" anchor="ctr">
+            <a:normAutofit fontScale="100000"/>
+          </a:bodyPr>
+          <a:lstStyle xmlns:a="http://schemas.openxmlformats.org/drawingml/2006/main"/>
+          <a:p xmlns:a="http://schemas.openxmlformats.org/drawingml/2006/main">
+            <a:pPr algn="l">
+              <a:defRPr sz="1575" b="1">
+                <a:solidFill>
+                  <a:srgbClr val="2F785D"/>
+                </a:solidFill>
+                <a:latin typeface="Arial"/>
+                <a:ea typeface="Arial"/>
+                <a:cs typeface="Arial"/>
+              </a:defRPr>
+            </a:pPr>
+            <a:r>
+              <a:rPr sz="1575" b="1">
+                <a:solidFill>
+                  <a:srgbClr val="2F785D"/>
+                </a:solidFill>
+                <a:latin typeface="Arial"/>
+                <a:ea typeface="Arial"/>
+                <a:cs typeface="Arial"/>
+              </a:rPr>
+              <a:t>Sale price = £204</a:t>
             </a:r>
           </a:p>
         </p:txBody>
@@ -8841,7 +8995,7 @@
     </p:spTree>
     <p:extLst>
       <p:ext uri="{BB962C8B-B14F-4D97-AF65-F5344CB8AC3E}">
-        <p14:creationId xmlns:p14="http://schemas.microsoft.com/office/powerpoint/2010/main" val="1895140093"/>
+        <p14:creationId xmlns:p14="http://schemas.microsoft.com/office/powerpoint/2010/main" val="1884805517"/>
       </p:ext>
     </p:extLst>
   </p:cSld>
@@ -9078,6 +9232,51 @@
                       </p:childTnLst>
                     </p:cTn>
                   </p:par>
+                  <p:par>
+                    <p:cTn id="23" fill="hold">
+                      <p:stCondLst>
+                        <p:cond delay="indefinite"/>
+                      </p:stCondLst>
+                      <p:childTnLst>
+                        <p:par>
+                          <p:cTn id="24" fill="hold">
+                            <p:stCondLst>
+                              <p:cond delay="0"/>
+                            </p:stCondLst>
+                            <p:childTnLst>
+                              <p:par>
+                                <p:cTn id="25" presetID="1" presetClass="entr" presetSubtype="0" fill="hold" grpId="0" nodeType="clickEffect">
+                                  <p:stCondLst>
+                                    <p:cond delay="0"/>
+                                  </p:stCondLst>
+                                  <p:childTnLst>
+                                    <p:set>
+                                      <p:cBhvr>
+                                        <p:cTn id="26" dur="1" fill="hold">
+                                          <p:stCondLst>
+                                            <p:cond delay="0"/>
+                                          </p:stCondLst>
+                                        </p:cTn>
+                                        <p:tgtEl>
+                                          <p:spTgt spid="25"/>
+                                        </p:tgtEl>
+                                        <p:attrNameLst>
+                                          <p:attrName>style.visibility</p:attrName>
+                                        </p:attrNameLst>
+                                      </p:cBhvr>
+                                      <p:to>
+                                        <p:strVal val="visible"/>
+                                      </p:to>
+                                    </p:set>
+                                  </p:childTnLst>
+                                </p:cTn>
+                              </p:par>
+                            </p:childTnLst>
+                          </p:cTn>
+                        </p:par>
+                      </p:childTnLst>
+                    </p:cTn>
+                  </p:par>
                 </p:childTnLst>
               </p:cTn>
               <p:prevCondLst>
@@ -9105,6 +9304,7 @@
       <p:bldP spid="16" grpId="0"/>
       <p:bldP spid="19" grpId="0"/>
       <p:bldP spid="22" grpId="0"/>
+      <p:bldP spid="25" grpId="0"/>
     </p:bldLst>
   </p:timing>
 </p:sld>
@@ -9134,7 +9334,7 @@
           <p:cNvPr id="15" name="">
             <a:extLst xmlns:a="http://schemas.openxmlformats.org/drawingml/2006/main">
               <a:ext uri="{FF2B5EF4-FFF2-40B4-BE49-F238E27FC236}">
-                <a16:creationId xmlns:a16="http://schemas.microsoft.com/office/drawing/2014/main" id="{036EE050-30B3-49F0-B050-8FF84BB87347}"/>
+                <a16:creationId xmlns:a16="http://schemas.microsoft.com/office/drawing/2014/main" id="{C883F153-18A5-49B2-9BB1-ABD16A9662F0}"/>
               </a:ext>
             </a:extLst>
           </p:cNvPr>
@@ -9166,7 +9366,7 @@
           <p:cNvPr id="2" name="">
             <a:extLst xmlns:a="http://schemas.openxmlformats.org/drawingml/2006/main">
               <a:ext uri="{FF2B5EF4-FFF2-40B4-BE49-F238E27FC236}">
-                <a16:creationId xmlns:a16="http://schemas.microsoft.com/office/drawing/2014/main" id="{DBDD8B8C-E154-4A97-B3EF-B85297968C46}"/>
+                <a16:creationId xmlns:a16="http://schemas.microsoft.com/office/drawing/2014/main" id="{97CEC204-0812-416E-8737-B71B111D4867}"/>
               </a:ext>
             </a:extLst>
           </p:cNvPr>
@@ -9223,7 +9423,7 @@
           <p:cNvPr id="3" name="">
             <a:extLst xmlns:a="http://schemas.openxmlformats.org/drawingml/2006/main">
               <a:ext uri="{FF2B5EF4-FFF2-40B4-BE49-F238E27FC236}">
-                <a16:creationId xmlns:a16="http://schemas.microsoft.com/office/drawing/2014/main" id="{991CD31B-E18D-400F-B537-90A5D37F78B3}"/>
+                <a16:creationId xmlns:a16="http://schemas.microsoft.com/office/drawing/2014/main" id="{6069853A-1A47-49DE-9054-9918394F4958}"/>
               </a:ext>
             </a:extLst>
           </p:cNvPr>
@@ -9255,7 +9455,7 @@
           <p:cNvPr id="4" name="">
             <a:extLst xmlns:a="http://schemas.openxmlformats.org/drawingml/2006/main">
               <a:ext uri="{FF2B5EF4-FFF2-40B4-BE49-F238E27FC236}">
-                <a16:creationId xmlns:a16="http://schemas.microsoft.com/office/drawing/2014/main" id="{F330863C-19F0-40A5-BC63-18D3DAFDD798}"/>
+                <a16:creationId xmlns:a16="http://schemas.microsoft.com/office/drawing/2014/main" id="{9C9F8E4F-AB76-4DFD-8889-87ABC8CECFE6}"/>
               </a:ext>
             </a:extLst>
           </p:cNvPr>
@@ -9312,7 +9512,7 @@
           <p:cNvPr id="5" name="">
             <a:extLst xmlns:a="http://schemas.openxmlformats.org/drawingml/2006/main">
               <a:ext uri="{FF2B5EF4-FFF2-40B4-BE49-F238E27FC236}">
-                <a16:creationId xmlns:a16="http://schemas.microsoft.com/office/drawing/2014/main" id="{0479FFD9-A7CB-476E-B84F-369F35E7C1A1}"/>
+                <a16:creationId xmlns:a16="http://schemas.microsoft.com/office/drawing/2014/main" id="{E729E8E3-74B2-4DDC-80F7-44FAB63F200C}"/>
               </a:ext>
             </a:extLst>
           </p:cNvPr>
@@ -9369,7 +9569,7 @@
           <p:cNvPr id="6" name="">
             <a:extLst xmlns:a="http://schemas.openxmlformats.org/drawingml/2006/main">
               <a:ext uri="{FF2B5EF4-FFF2-40B4-BE49-F238E27FC236}">
-                <a16:creationId xmlns:a16="http://schemas.microsoft.com/office/drawing/2014/main" id="{D11AA16E-4F99-4A28-BF5B-DE1B90BD2822}"/>
+                <a16:creationId xmlns:a16="http://schemas.microsoft.com/office/drawing/2014/main" id="{1512D22E-B6F9-4CD5-B5D0-E72AAC3DE116}"/>
               </a:ext>
             </a:extLst>
           </p:cNvPr>
@@ -9426,7 +9626,7 @@
           <p:cNvPr id="7" name="">
             <a:extLst xmlns:a="http://schemas.openxmlformats.org/drawingml/2006/main">
               <a:ext uri="{FF2B5EF4-FFF2-40B4-BE49-F238E27FC236}">
-                <a16:creationId xmlns:a16="http://schemas.microsoft.com/office/drawing/2014/main" id="{37F9F8BD-6118-4DBE-BE2E-2133053B1EE1}"/>
+                <a16:creationId xmlns:a16="http://schemas.microsoft.com/office/drawing/2014/main" id="{F156E563-CD3A-43FC-9622-46FEBE805DA8}"/>
               </a:ext>
             </a:extLst>
           </p:cNvPr>
@@ -9458,7 +9658,7 @@
           <p:cNvPr id="8" name="">
             <a:extLst xmlns:a="http://schemas.openxmlformats.org/drawingml/2006/main">
               <a:ext uri="{FF2B5EF4-FFF2-40B4-BE49-F238E27FC236}">
-                <a16:creationId xmlns:a16="http://schemas.microsoft.com/office/drawing/2014/main" id="{D38F3934-5B5E-4469-B163-6011CA75EA15}"/>
+                <a16:creationId xmlns:a16="http://schemas.microsoft.com/office/drawing/2014/main" id="{2C4BF7EC-B463-4D4D-8AB5-2DC41FDB7723}"/>
               </a:ext>
             </a:extLst>
           </p:cNvPr>
@@ -9515,7 +9715,7 @@
           <p:cNvPr id="9" name="">
             <a:extLst xmlns:a="http://schemas.openxmlformats.org/drawingml/2006/main">
               <a:ext uri="{FF2B5EF4-FFF2-40B4-BE49-F238E27FC236}">
-                <a16:creationId xmlns:a16="http://schemas.microsoft.com/office/drawing/2014/main" id="{58BA8A1C-8313-4393-A7FE-D48646535629}"/>
+                <a16:creationId xmlns:a16="http://schemas.microsoft.com/office/drawing/2014/main" id="{A7969036-20F5-41EB-9AE3-5BF776C9E6C7}"/>
               </a:ext>
             </a:extLst>
           </p:cNvPr>
@@ -9572,7 +9772,7 @@
           <p:cNvPr id="10" name="">
             <a:extLst xmlns:a="http://schemas.openxmlformats.org/drawingml/2006/main">
               <a:ext uri="{FF2B5EF4-FFF2-40B4-BE49-F238E27FC236}">
-                <a16:creationId xmlns:a16="http://schemas.microsoft.com/office/drawing/2014/main" id="{29BE7BC8-AE29-430E-ACB1-929167C8DE5A}"/>
+                <a16:creationId xmlns:a16="http://schemas.microsoft.com/office/drawing/2014/main" id="{FBC7B268-9DC6-444E-B898-A3C411FC00C6}"/>
               </a:ext>
             </a:extLst>
           </p:cNvPr>
@@ -9629,7 +9829,7 @@
           <p:cNvPr id="11" name="">
             <a:extLst xmlns:a="http://schemas.openxmlformats.org/drawingml/2006/main">
               <a:ext uri="{FF2B5EF4-FFF2-40B4-BE49-F238E27FC236}">
-                <a16:creationId xmlns:a16="http://schemas.microsoft.com/office/drawing/2014/main" id="{0C7D6352-5833-4E37-BB5A-01481E996D0A}"/>
+                <a16:creationId xmlns:a16="http://schemas.microsoft.com/office/drawing/2014/main" id="{942A705A-F4A4-4774-AC0C-770B92CAB2A4}"/>
               </a:ext>
             </a:extLst>
           </p:cNvPr>
@@ -9686,7 +9886,7 @@
           <p:cNvPr id="12" name="">
             <a:extLst xmlns:a="http://schemas.openxmlformats.org/drawingml/2006/main">
               <a:ext uri="{FF2B5EF4-FFF2-40B4-BE49-F238E27FC236}">
-                <a16:creationId xmlns:a16="http://schemas.microsoft.com/office/drawing/2014/main" id="{5163B1F2-45DE-4F82-9D67-DBA02045EA3C}"/>
+                <a16:creationId xmlns:a16="http://schemas.microsoft.com/office/drawing/2014/main" id="{0C10736F-3A4D-4E65-BFE9-AC9391CB6CB7}"/>
               </a:ext>
             </a:extLst>
           </p:cNvPr>
@@ -9718,7 +9918,7 @@
           <p:cNvPr id="13" name="">
             <a:extLst xmlns:a="http://schemas.openxmlformats.org/drawingml/2006/main">
               <a:ext uri="{FF2B5EF4-FFF2-40B4-BE49-F238E27FC236}">
-                <a16:creationId xmlns:a16="http://schemas.microsoft.com/office/drawing/2014/main" id="{CB4F7E2D-2AE3-4D7F-ACA4-83C5B5FD6184}"/>
+                <a16:creationId xmlns:a16="http://schemas.microsoft.com/office/drawing/2014/main" id="{054F9EC0-DBDA-446B-938D-4E75F500BC34}"/>
               </a:ext>
             </a:extLst>
           </p:cNvPr>
@@ -9775,7 +9975,7 @@
           <p:cNvPr id="14" name="">
             <a:extLst xmlns:a="http://schemas.openxmlformats.org/drawingml/2006/main">
               <a:ext uri="{FF2B5EF4-FFF2-40B4-BE49-F238E27FC236}">
-                <a16:creationId xmlns:a16="http://schemas.microsoft.com/office/drawing/2014/main" id="{3563040B-B962-4538-889C-EE03C2E16935}"/>
+                <a16:creationId xmlns:a16="http://schemas.microsoft.com/office/drawing/2014/main" id="{7381A1AF-A1CE-4E01-8470-7EE557771E57}"/>
               </a:ext>
             </a:extLst>
           </p:cNvPr>
@@ -9830,7 +10030,7 @@
     </p:spTree>
     <p:extLst>
       <p:ext uri="{BB962C8B-B14F-4D97-AF65-F5344CB8AC3E}">
-        <p14:creationId xmlns:p14="http://schemas.microsoft.com/office/powerpoint/2010/main" val="872237389"/>
+        <p14:creationId xmlns:p14="http://schemas.microsoft.com/office/powerpoint/2010/main" val="1322380091"/>
       </p:ext>
     </p:extLst>
   </p:cSld>
@@ -10031,7 +10231,7 @@
           <p:cNvPr id="16" name="">
             <a:extLst xmlns:a="http://schemas.openxmlformats.org/drawingml/2006/main">
               <a:ext uri="{FF2B5EF4-FFF2-40B4-BE49-F238E27FC236}">
-                <a16:creationId xmlns:a16="http://schemas.microsoft.com/office/drawing/2014/main" id="{1658698E-B20B-4EE7-9C55-02B91CB7DCDD}"/>
+                <a16:creationId xmlns:a16="http://schemas.microsoft.com/office/drawing/2014/main" id="{E068F79B-5AA1-448D-8772-E73F7FD6A40A}"/>
               </a:ext>
             </a:extLst>
           </p:cNvPr>
@@ -10063,7 +10263,7 @@
           <p:cNvPr id="2" name="">
             <a:extLst xmlns:a="http://schemas.openxmlformats.org/drawingml/2006/main">
               <a:ext uri="{FF2B5EF4-FFF2-40B4-BE49-F238E27FC236}">
-                <a16:creationId xmlns:a16="http://schemas.microsoft.com/office/drawing/2014/main" id="{8682CBF5-B3A6-41D9-AFF2-209737F55401}"/>
+                <a16:creationId xmlns:a16="http://schemas.microsoft.com/office/drawing/2014/main" id="{22D22599-5C49-4CC7-A13E-FC695A559FC8}"/>
               </a:ext>
             </a:extLst>
           </p:cNvPr>
@@ -10120,7 +10320,7 @@
           <p:cNvPr id="3" name="">
             <a:extLst xmlns:a="http://schemas.openxmlformats.org/drawingml/2006/main">
               <a:ext uri="{FF2B5EF4-FFF2-40B4-BE49-F238E27FC236}">
-                <a16:creationId xmlns:a16="http://schemas.microsoft.com/office/drawing/2014/main" id="{61C9358B-F6FB-4024-BB47-58204EA29CBF}"/>
+                <a16:creationId xmlns:a16="http://schemas.microsoft.com/office/drawing/2014/main" id="{F0A89035-9FD6-4D38-AF93-20FCF907B83F}"/>
               </a:ext>
             </a:extLst>
           </p:cNvPr>
@@ -10152,7 +10352,7 @@
           <p:cNvPr id="4" name="">
             <a:extLst xmlns:a="http://schemas.openxmlformats.org/drawingml/2006/main">
               <a:ext uri="{FF2B5EF4-FFF2-40B4-BE49-F238E27FC236}">
-                <a16:creationId xmlns:a16="http://schemas.microsoft.com/office/drawing/2014/main" id="{ADA67B0E-7233-43E7-9EAC-B8E65172EB1A}"/>
+                <a16:creationId xmlns:a16="http://schemas.microsoft.com/office/drawing/2014/main" id="{8E3CD81F-1F00-43DB-9F75-8F4DED69C58A}"/>
               </a:ext>
             </a:extLst>
           </p:cNvPr>
@@ -10209,7 +10409,7 @@
           <p:cNvPr id="5" name="">
             <a:extLst xmlns:a="http://schemas.openxmlformats.org/drawingml/2006/main">
               <a:ext uri="{FF2B5EF4-FFF2-40B4-BE49-F238E27FC236}">
-                <a16:creationId xmlns:a16="http://schemas.microsoft.com/office/drawing/2014/main" id="{0B48D641-A35C-4378-AE94-D6CF6E50D397}"/>
+                <a16:creationId xmlns:a16="http://schemas.microsoft.com/office/drawing/2014/main" id="{9C2FC708-279C-476B-B5DF-FFA791A971D0}"/>
               </a:ext>
             </a:extLst>
           </p:cNvPr>
@@ -10266,7 +10466,7 @@
           <p:cNvPr id="6" name="">
             <a:extLst xmlns:a="http://schemas.openxmlformats.org/drawingml/2006/main">
               <a:ext uri="{FF2B5EF4-FFF2-40B4-BE49-F238E27FC236}">
-                <a16:creationId xmlns:a16="http://schemas.microsoft.com/office/drawing/2014/main" id="{75EBFC85-D9E2-4426-B799-BA0CF9B32671}"/>
+                <a16:creationId xmlns:a16="http://schemas.microsoft.com/office/drawing/2014/main" id="{9BF14CC6-515C-4257-9D9A-7D01E8AC4034}"/>
               </a:ext>
             </a:extLst>
           </p:cNvPr>
@@ -10323,7 +10523,7 @@
           <p:cNvPr id="7" name="">
             <a:extLst xmlns:a="http://schemas.openxmlformats.org/drawingml/2006/main">
               <a:ext uri="{FF2B5EF4-FFF2-40B4-BE49-F238E27FC236}">
-                <a16:creationId xmlns:a16="http://schemas.microsoft.com/office/drawing/2014/main" id="{0DC484BF-07B5-4DEC-BDFC-500FBFF17DD2}"/>
+                <a16:creationId xmlns:a16="http://schemas.microsoft.com/office/drawing/2014/main" id="{DC01FEB2-C73B-4364-AA10-884B0D0200D1}"/>
               </a:ext>
             </a:extLst>
           </p:cNvPr>
@@ -10355,7 +10555,7 @@
           <p:cNvPr id="8" name="">
             <a:extLst xmlns:a="http://schemas.openxmlformats.org/drawingml/2006/main">
               <a:ext uri="{FF2B5EF4-FFF2-40B4-BE49-F238E27FC236}">
-                <a16:creationId xmlns:a16="http://schemas.microsoft.com/office/drawing/2014/main" id="{C880F795-A297-4C4D-81EB-FBA42846D669}"/>
+                <a16:creationId xmlns:a16="http://schemas.microsoft.com/office/drawing/2014/main" id="{843F06F0-CF38-4400-8141-984EB7DDFA22}"/>
               </a:ext>
             </a:extLst>
           </p:cNvPr>
@@ -10412,7 +10612,7 @@
           <p:cNvPr id="9" name="">
             <a:extLst xmlns:a="http://schemas.openxmlformats.org/drawingml/2006/main">
               <a:ext uri="{FF2B5EF4-FFF2-40B4-BE49-F238E27FC236}">
-                <a16:creationId xmlns:a16="http://schemas.microsoft.com/office/drawing/2014/main" id="{2065BC3B-9239-45DF-B7FA-D7AD7EB2AF57}"/>
+                <a16:creationId xmlns:a16="http://schemas.microsoft.com/office/drawing/2014/main" id="{F179240A-F53A-4B12-B7D7-DF47F5268F01}"/>
               </a:ext>
             </a:extLst>
           </p:cNvPr>
@@ -10469,7 +10669,7 @@
           <p:cNvPr id="10" name="">
             <a:extLst xmlns:a="http://schemas.openxmlformats.org/drawingml/2006/main">
               <a:ext uri="{FF2B5EF4-FFF2-40B4-BE49-F238E27FC236}">
-                <a16:creationId xmlns:a16="http://schemas.microsoft.com/office/drawing/2014/main" id="{33E4A529-B553-45D1-AB7C-880368D65182}"/>
+                <a16:creationId xmlns:a16="http://schemas.microsoft.com/office/drawing/2014/main" id="{3DF6D729-4F9B-4540-8011-7FB8F881F15B}"/>
               </a:ext>
             </a:extLst>
           </p:cNvPr>
@@ -10526,7 +10726,7 @@
           <p:cNvPr id="11" name="">
             <a:extLst xmlns:a="http://schemas.openxmlformats.org/drawingml/2006/main">
               <a:ext uri="{FF2B5EF4-FFF2-40B4-BE49-F238E27FC236}">
-                <a16:creationId xmlns:a16="http://schemas.microsoft.com/office/drawing/2014/main" id="{4D61D963-B725-4CF9-A08A-AC5CCFF3B7A0}"/>
+                <a16:creationId xmlns:a16="http://schemas.microsoft.com/office/drawing/2014/main" id="{FF545051-D36B-4D0B-BC5B-B9272B15AA6F}"/>
               </a:ext>
             </a:extLst>
           </p:cNvPr>
@@ -10583,7 +10783,7 @@
           <p:cNvPr id="12" name="">
             <a:extLst xmlns:a="http://schemas.openxmlformats.org/drawingml/2006/main">
               <a:ext uri="{FF2B5EF4-FFF2-40B4-BE49-F238E27FC236}">
-                <a16:creationId xmlns:a16="http://schemas.microsoft.com/office/drawing/2014/main" id="{7E985C1A-7B9B-4007-A34F-AC78A6268DD5}"/>
+                <a16:creationId xmlns:a16="http://schemas.microsoft.com/office/drawing/2014/main" id="{12D6B101-1D08-4FE3-AE1B-FB6EBA836437}"/>
               </a:ext>
             </a:extLst>
           </p:cNvPr>
@@ -10640,7 +10840,7 @@
           <p:cNvPr id="13" name="">
             <a:extLst xmlns:a="http://schemas.openxmlformats.org/drawingml/2006/main">
               <a:ext uri="{FF2B5EF4-FFF2-40B4-BE49-F238E27FC236}">
-                <a16:creationId xmlns:a16="http://schemas.microsoft.com/office/drawing/2014/main" id="{D9D79971-523E-466C-A1BB-4DEBA0699FE8}"/>
+                <a16:creationId xmlns:a16="http://schemas.microsoft.com/office/drawing/2014/main" id="{938E5C42-BF94-4487-B423-9E7E70B8E414}"/>
               </a:ext>
             </a:extLst>
           </p:cNvPr>
@@ -10697,7 +10897,7 @@
           <p:cNvPr id="14" name="">
             <a:extLst xmlns:a="http://schemas.openxmlformats.org/drawingml/2006/main">
               <a:ext uri="{FF2B5EF4-FFF2-40B4-BE49-F238E27FC236}">
-                <a16:creationId xmlns:a16="http://schemas.microsoft.com/office/drawing/2014/main" id="{C0983D92-F366-4E17-B8C4-7F45100B240B}"/>
+                <a16:creationId xmlns:a16="http://schemas.microsoft.com/office/drawing/2014/main" id="{32BBCD40-23FC-4426-9268-1B55FFE7D421}"/>
               </a:ext>
             </a:extLst>
           </p:cNvPr>
@@ -10754,7 +10954,7 @@
           <p:cNvPr id="15" name="">
             <a:extLst xmlns:a="http://schemas.openxmlformats.org/drawingml/2006/main">
               <a:ext uri="{FF2B5EF4-FFF2-40B4-BE49-F238E27FC236}">
-                <a16:creationId xmlns:a16="http://schemas.microsoft.com/office/drawing/2014/main" id="{B1630A34-8CC1-4616-B4F5-AA59B6DA6082}"/>
+                <a16:creationId xmlns:a16="http://schemas.microsoft.com/office/drawing/2014/main" id="{1B6122C7-745E-40BC-9A13-66B0DCD92AA4}"/>
               </a:ext>
             </a:extLst>
           </p:cNvPr>
@@ -10809,7 +11009,7 @@
     </p:spTree>
     <p:extLst>
       <p:ext uri="{BB962C8B-B14F-4D97-AF65-F5344CB8AC3E}">
-        <p14:creationId xmlns:p14="http://schemas.microsoft.com/office/powerpoint/2010/main" val="51589248"/>
+        <p14:creationId xmlns:p14="http://schemas.microsoft.com/office/powerpoint/2010/main" val="1574106565"/>
       </p:ext>
     </p:extLst>
   </p:cSld>
@@ -10964,7 +11164,7 @@
           <p:cNvPr id="16" name="">
             <a:extLst xmlns:a="http://schemas.openxmlformats.org/drawingml/2006/main">
               <a:ext uri="{FF2B5EF4-FFF2-40B4-BE49-F238E27FC236}">
-                <a16:creationId xmlns:a16="http://schemas.microsoft.com/office/drawing/2014/main" id="{98E4A19D-E12F-4A51-BD92-E0E80419603C}"/>
+                <a16:creationId xmlns:a16="http://schemas.microsoft.com/office/drawing/2014/main" id="{A2E70D68-5004-472A-A19F-753B4BFF8ABB}"/>
               </a:ext>
             </a:extLst>
           </p:cNvPr>
@@ -10996,7 +11196,7 @@
           <p:cNvPr id="2" name="">
             <a:extLst xmlns:a="http://schemas.openxmlformats.org/drawingml/2006/main">
               <a:ext uri="{FF2B5EF4-FFF2-40B4-BE49-F238E27FC236}">
-                <a16:creationId xmlns:a16="http://schemas.microsoft.com/office/drawing/2014/main" id="{2501EB79-25FC-4066-84BB-722C5F749564}"/>
+                <a16:creationId xmlns:a16="http://schemas.microsoft.com/office/drawing/2014/main" id="{A202435E-91BE-4793-A5F1-95C4AB081A81}"/>
               </a:ext>
             </a:extLst>
           </p:cNvPr>
@@ -11053,7 +11253,7 @@
           <p:cNvPr id="3" name="">
             <a:extLst xmlns:a="http://schemas.openxmlformats.org/drawingml/2006/main">
               <a:ext uri="{FF2B5EF4-FFF2-40B4-BE49-F238E27FC236}">
-                <a16:creationId xmlns:a16="http://schemas.microsoft.com/office/drawing/2014/main" id="{E889D00C-B5F4-4915-A831-85B336744459}"/>
+                <a16:creationId xmlns:a16="http://schemas.microsoft.com/office/drawing/2014/main" id="{4EE1BD17-C873-48CF-B138-1783641D00EC}"/>
               </a:ext>
             </a:extLst>
           </p:cNvPr>
@@ -11085,7 +11285,7 @@
           <p:cNvPr id="4" name="">
             <a:extLst xmlns:a="http://schemas.openxmlformats.org/drawingml/2006/main">
               <a:ext uri="{FF2B5EF4-FFF2-40B4-BE49-F238E27FC236}">
-                <a16:creationId xmlns:a16="http://schemas.microsoft.com/office/drawing/2014/main" id="{374A6487-8CDD-4E05-B291-9017134B2ECB}"/>
+                <a16:creationId xmlns:a16="http://schemas.microsoft.com/office/drawing/2014/main" id="{60CC46F6-8ACC-4D64-AB50-BD99C94730A9}"/>
               </a:ext>
             </a:extLst>
           </p:cNvPr>
@@ -11142,7 +11342,7 @@
           <p:cNvPr id="5" name="">
             <a:extLst xmlns:a="http://schemas.openxmlformats.org/drawingml/2006/main">
               <a:ext uri="{FF2B5EF4-FFF2-40B4-BE49-F238E27FC236}">
-                <a16:creationId xmlns:a16="http://schemas.microsoft.com/office/drawing/2014/main" id="{F6109A54-7478-4825-8B1D-DD5CA9849F7C}"/>
+                <a16:creationId xmlns:a16="http://schemas.microsoft.com/office/drawing/2014/main" id="{391A178A-F4F6-4773-AFA2-4887E817A1FD}"/>
               </a:ext>
             </a:extLst>
           </p:cNvPr>
@@ -11199,7 +11399,7 @@
           <p:cNvPr id="6" name="">
             <a:extLst xmlns:a="http://schemas.openxmlformats.org/drawingml/2006/main">
               <a:ext uri="{FF2B5EF4-FFF2-40B4-BE49-F238E27FC236}">
-                <a16:creationId xmlns:a16="http://schemas.microsoft.com/office/drawing/2014/main" id="{4A8CFA37-81F7-49F2-99E7-ADE4EBA16F23}"/>
+                <a16:creationId xmlns:a16="http://schemas.microsoft.com/office/drawing/2014/main" id="{DB0B1818-95BD-4410-8FAA-CCC1FD9A75AA}"/>
               </a:ext>
             </a:extLst>
           </p:cNvPr>
@@ -11256,7 +11456,7 @@
           <p:cNvPr id="7" name="">
             <a:extLst xmlns:a="http://schemas.openxmlformats.org/drawingml/2006/main">
               <a:ext uri="{FF2B5EF4-FFF2-40B4-BE49-F238E27FC236}">
-                <a16:creationId xmlns:a16="http://schemas.microsoft.com/office/drawing/2014/main" id="{2128B710-3ED6-4F1E-A462-6D7F041FA44E}"/>
+                <a16:creationId xmlns:a16="http://schemas.microsoft.com/office/drawing/2014/main" id="{0CF9BF59-B7A7-4398-B1D6-5F59B2954052}"/>
               </a:ext>
             </a:extLst>
           </p:cNvPr>
@@ -11288,7 +11488,7 @@
           <p:cNvPr id="8" name="">
             <a:extLst xmlns:a="http://schemas.openxmlformats.org/drawingml/2006/main">
               <a:ext uri="{FF2B5EF4-FFF2-40B4-BE49-F238E27FC236}">
-                <a16:creationId xmlns:a16="http://schemas.microsoft.com/office/drawing/2014/main" id="{0E4FB3DF-6C10-43B4-87D1-092C5158F776}"/>
+                <a16:creationId xmlns:a16="http://schemas.microsoft.com/office/drawing/2014/main" id="{61FB75EF-7A19-4915-B28A-C63E5048334D}"/>
               </a:ext>
             </a:extLst>
           </p:cNvPr>
@@ -11345,7 +11545,7 @@
           <p:cNvPr id="9" name="">
             <a:extLst xmlns:a="http://schemas.openxmlformats.org/drawingml/2006/main">
               <a:ext uri="{FF2B5EF4-FFF2-40B4-BE49-F238E27FC236}">
-                <a16:creationId xmlns:a16="http://schemas.microsoft.com/office/drawing/2014/main" id="{F5330EA0-4432-4387-A296-E89C6B7479B5}"/>
+                <a16:creationId xmlns:a16="http://schemas.microsoft.com/office/drawing/2014/main" id="{DCF2EF91-9075-42E8-A505-3CDD49342D6E}"/>
               </a:ext>
             </a:extLst>
           </p:cNvPr>
@@ -11406,7 +11606,7 @@
           <p:nvPr/>
         </p:nvPicPr>
         <p:blipFill>
-          <a:blip xmlns:r="http://schemas.openxmlformats.org/officeDocument/2006/relationships" xmlns:a="http://schemas.openxmlformats.org/drawingml/2006/main" r:embed="Rc01fcfeef427456f"/>
+          <a:blip xmlns:r="http://schemas.openxmlformats.org/officeDocument/2006/relationships" xmlns:a="http://schemas.openxmlformats.org/drawingml/2006/main" r:embed="R8aa9c9f66372443b"/>
           <a:stretch xmlns:a="http://schemas.openxmlformats.org/drawingml/2006/main"/>
         </p:blipFill>
         <p:spPr>
@@ -11424,7 +11624,7 @@
           <p:cNvPr id="11" name="">
             <a:extLst xmlns:a="http://schemas.openxmlformats.org/drawingml/2006/main">
               <a:ext uri="{FF2B5EF4-FFF2-40B4-BE49-F238E27FC236}">
-                <a16:creationId xmlns:a16="http://schemas.microsoft.com/office/drawing/2014/main" id="{F6623B56-8706-413B-86ED-E8223891B001}"/>
+                <a16:creationId xmlns:a16="http://schemas.microsoft.com/office/drawing/2014/main" id="{6145B7CC-2559-464B-9D7A-79E5673E8B6F}"/>
               </a:ext>
             </a:extLst>
           </p:cNvPr>
@@ -11481,7 +11681,7 @@
           <p:cNvPr id="12" name="">
             <a:extLst xmlns:a="http://schemas.openxmlformats.org/drawingml/2006/main">
               <a:ext uri="{FF2B5EF4-FFF2-40B4-BE49-F238E27FC236}">
-                <a16:creationId xmlns:a16="http://schemas.microsoft.com/office/drawing/2014/main" id="{0D613C1E-9A6A-4317-8D3C-90E18336AF90}"/>
+                <a16:creationId xmlns:a16="http://schemas.microsoft.com/office/drawing/2014/main" id="{86696EE9-CAE4-4446-A7B2-8C6E27ACBB88}"/>
               </a:ext>
             </a:extLst>
           </p:cNvPr>
@@ -11538,7 +11738,7 @@
           <p:cNvPr id="13" name="">
             <a:extLst xmlns:a="http://schemas.openxmlformats.org/drawingml/2006/main">
               <a:ext uri="{FF2B5EF4-FFF2-40B4-BE49-F238E27FC236}">
-                <a16:creationId xmlns:a16="http://schemas.microsoft.com/office/drawing/2014/main" id="{98D02FA6-1370-4687-AB75-EC90D5D2924B}"/>
+                <a16:creationId xmlns:a16="http://schemas.microsoft.com/office/drawing/2014/main" id="{EFF4F7AB-4C59-49FC-8501-C39AB2543BFC}"/>
               </a:ext>
             </a:extLst>
           </p:cNvPr>
@@ -11570,7 +11770,7 @@
           <p:cNvPr id="14" name="">
             <a:extLst xmlns:a="http://schemas.openxmlformats.org/drawingml/2006/main">
               <a:ext uri="{FF2B5EF4-FFF2-40B4-BE49-F238E27FC236}">
-                <a16:creationId xmlns:a16="http://schemas.microsoft.com/office/drawing/2014/main" id="{E38726DE-67D1-4DC8-BE3A-3D134C749BA8}"/>
+                <a16:creationId xmlns:a16="http://schemas.microsoft.com/office/drawing/2014/main" id="{BBC104E4-1B34-41B2-99DB-0104226DF1DB}"/>
               </a:ext>
             </a:extLst>
           </p:cNvPr>
@@ -11627,7 +11827,7 @@
           <p:cNvPr id="15" name="">
             <a:extLst xmlns:a="http://schemas.openxmlformats.org/drawingml/2006/main">
               <a:ext uri="{FF2B5EF4-FFF2-40B4-BE49-F238E27FC236}">
-                <a16:creationId xmlns:a16="http://schemas.microsoft.com/office/drawing/2014/main" id="{13B009D8-07CE-41AA-9CDC-31A6668A72F6}"/>
+                <a16:creationId xmlns:a16="http://schemas.microsoft.com/office/drawing/2014/main" id="{459A509E-7F2A-4445-B560-3AB2135666C8}"/>
               </a:ext>
             </a:extLst>
           </p:cNvPr>
@@ -11682,7 +11882,7 @@
     </p:spTree>
     <p:extLst>
       <p:ext uri="{BB962C8B-B14F-4D97-AF65-F5344CB8AC3E}">
-        <p14:creationId xmlns:p14="http://schemas.microsoft.com/office/powerpoint/2010/main" val="468441685"/>
+        <p14:creationId xmlns:p14="http://schemas.microsoft.com/office/powerpoint/2010/main" val="1867033079"/>
       </p:ext>
     </p:extLst>
   </p:cSld>
@@ -11837,7 +12037,7 @@
           <p:cNvPr id="23" name="">
             <a:extLst xmlns:a="http://schemas.openxmlformats.org/drawingml/2006/main">
               <a:ext uri="{FF2B5EF4-FFF2-40B4-BE49-F238E27FC236}">
-                <a16:creationId xmlns:a16="http://schemas.microsoft.com/office/drawing/2014/main" id="{D4B38B5D-75DA-4229-B715-8B66FDF4F92B}"/>
+                <a16:creationId xmlns:a16="http://schemas.microsoft.com/office/drawing/2014/main" id="{7F01DFE1-D745-4DF1-8D03-8EEE43B1B76E}"/>
               </a:ext>
             </a:extLst>
           </p:cNvPr>
@@ -11869,7 +12069,7 @@
           <p:cNvPr id="2" name="">
             <a:extLst xmlns:a="http://schemas.openxmlformats.org/drawingml/2006/main">
               <a:ext uri="{FF2B5EF4-FFF2-40B4-BE49-F238E27FC236}">
-                <a16:creationId xmlns:a16="http://schemas.microsoft.com/office/drawing/2014/main" id="{9C2C756A-0178-4539-94D8-099A1A7EEDAC}"/>
+                <a16:creationId xmlns:a16="http://schemas.microsoft.com/office/drawing/2014/main" id="{7587FD26-50E8-4807-BE5B-3C4D7966268A}"/>
               </a:ext>
             </a:extLst>
           </p:cNvPr>
@@ -11926,7 +12126,7 @@
           <p:cNvPr id="3" name="">
             <a:extLst xmlns:a="http://schemas.openxmlformats.org/drawingml/2006/main">
               <a:ext uri="{FF2B5EF4-FFF2-40B4-BE49-F238E27FC236}">
-                <a16:creationId xmlns:a16="http://schemas.microsoft.com/office/drawing/2014/main" id="{7A2061D3-32AB-4211-B9AB-EA84CEFA1215}"/>
+                <a16:creationId xmlns:a16="http://schemas.microsoft.com/office/drawing/2014/main" id="{4E27931A-7833-4CBB-A1C2-72ABC815E5D7}"/>
               </a:ext>
             </a:extLst>
           </p:cNvPr>
@@ -11958,7 +12158,7 @@
           <p:cNvPr id="4" name="">
             <a:extLst xmlns:a="http://schemas.openxmlformats.org/drawingml/2006/main">
               <a:ext uri="{FF2B5EF4-FFF2-40B4-BE49-F238E27FC236}">
-                <a16:creationId xmlns:a16="http://schemas.microsoft.com/office/drawing/2014/main" id="{4B39F89C-5FF8-4AC8-AF1F-A8C201681B0D}"/>
+                <a16:creationId xmlns:a16="http://schemas.microsoft.com/office/drawing/2014/main" id="{D287D1FA-9FEF-4B0D-B425-1ADE489B39E5}"/>
               </a:ext>
             </a:extLst>
           </p:cNvPr>
@@ -12015,7 +12215,7 @@
           <p:cNvPr id="5" name="">
             <a:extLst xmlns:a="http://schemas.openxmlformats.org/drawingml/2006/main">
               <a:ext uri="{FF2B5EF4-FFF2-40B4-BE49-F238E27FC236}">
-                <a16:creationId xmlns:a16="http://schemas.microsoft.com/office/drawing/2014/main" id="{14DE6533-0039-4B96-9096-D26EF75602FC}"/>
+                <a16:creationId xmlns:a16="http://schemas.microsoft.com/office/drawing/2014/main" id="{50B2F5B6-6FA4-4C53-96AB-E2E85797FC10}"/>
               </a:ext>
             </a:extLst>
           </p:cNvPr>
@@ -12072,7 +12272,7 @@
           <p:cNvPr id="6" name="">
             <a:extLst xmlns:a="http://schemas.openxmlformats.org/drawingml/2006/main">
               <a:ext uri="{FF2B5EF4-FFF2-40B4-BE49-F238E27FC236}">
-                <a16:creationId xmlns:a16="http://schemas.microsoft.com/office/drawing/2014/main" id="{F25CB771-91FA-4FB6-8F11-BDDEC8CA9971}"/>
+                <a16:creationId xmlns:a16="http://schemas.microsoft.com/office/drawing/2014/main" id="{0AFB9374-528F-43E9-8101-A5B6BDDE5008}"/>
               </a:ext>
             </a:extLst>
           </p:cNvPr>
@@ -12129,7 +12329,7 @@
           <p:cNvPr id="7" name="">
             <a:extLst xmlns:a="http://schemas.openxmlformats.org/drawingml/2006/main">
               <a:ext uri="{FF2B5EF4-FFF2-40B4-BE49-F238E27FC236}">
-                <a16:creationId xmlns:a16="http://schemas.microsoft.com/office/drawing/2014/main" id="{90D9FAB1-5CD7-493D-8D6B-FA453583447F}"/>
+                <a16:creationId xmlns:a16="http://schemas.microsoft.com/office/drawing/2014/main" id="{B8D1BCF0-8543-4EC4-9E41-0CF5B982048F}"/>
               </a:ext>
             </a:extLst>
           </p:cNvPr>
@@ -12161,7 +12361,7 @@
           <p:cNvPr id="8" name="">
             <a:extLst xmlns:a="http://schemas.openxmlformats.org/drawingml/2006/main">
               <a:ext uri="{FF2B5EF4-FFF2-40B4-BE49-F238E27FC236}">
-                <a16:creationId xmlns:a16="http://schemas.microsoft.com/office/drawing/2014/main" id="{87CBD82C-F739-4EC4-9C98-BDBCD227DBBB}"/>
+                <a16:creationId xmlns:a16="http://schemas.microsoft.com/office/drawing/2014/main" id="{0452649A-CF26-4F59-B563-E82C2D4C2F0D}"/>
               </a:ext>
             </a:extLst>
           </p:cNvPr>
@@ -12218,7 +12418,7 @@
           <p:cNvPr id="9" name="">
             <a:extLst xmlns:a="http://schemas.openxmlformats.org/drawingml/2006/main">
               <a:ext uri="{FF2B5EF4-FFF2-40B4-BE49-F238E27FC236}">
-                <a16:creationId xmlns:a16="http://schemas.microsoft.com/office/drawing/2014/main" id="{C8B6150F-BE24-4780-BEC1-BCFA19EDD0D8}"/>
+                <a16:creationId xmlns:a16="http://schemas.microsoft.com/office/drawing/2014/main" id="{1BB95445-3D66-4E3A-9DF8-36E6C864F6F4}"/>
               </a:ext>
             </a:extLst>
           </p:cNvPr>
@@ -12275,7 +12475,7 @@
           <p:cNvPr id="10" name="">
             <a:extLst xmlns:a="http://schemas.openxmlformats.org/drawingml/2006/main">
               <a:ext uri="{FF2B5EF4-FFF2-40B4-BE49-F238E27FC236}">
-                <a16:creationId xmlns:a16="http://schemas.microsoft.com/office/drawing/2014/main" id="{E51A5432-951B-4289-9223-0E3478172BC0}"/>
+                <a16:creationId xmlns:a16="http://schemas.microsoft.com/office/drawing/2014/main" id="{BC92AD3E-D1B2-47DB-9DDC-F1221F148D2B}"/>
               </a:ext>
             </a:extLst>
           </p:cNvPr>
@@ -12309,7 +12509,7 @@
           <p:cNvPr id="11" name="">
             <a:extLst xmlns:a="http://schemas.openxmlformats.org/drawingml/2006/main">
               <a:ext uri="{FF2B5EF4-FFF2-40B4-BE49-F238E27FC236}">
-                <a16:creationId xmlns:a16="http://schemas.microsoft.com/office/drawing/2014/main" id="{9B058D72-CFE1-441F-8755-90BB19DA8BE5}"/>
+                <a16:creationId xmlns:a16="http://schemas.microsoft.com/office/drawing/2014/main" id="{1BA65B91-1FE1-460F-BAEE-42D3478ACD47}"/>
               </a:ext>
             </a:extLst>
           </p:cNvPr>
@@ -12341,7 +12541,7 @@
           <p:cNvPr id="12" name="">
             <a:extLst xmlns:a="http://schemas.openxmlformats.org/drawingml/2006/main">
               <a:ext uri="{FF2B5EF4-FFF2-40B4-BE49-F238E27FC236}">
-                <a16:creationId xmlns:a16="http://schemas.microsoft.com/office/drawing/2014/main" id="{2E1B0FCB-C810-468F-9A19-14DF57A2B688}"/>
+                <a16:creationId xmlns:a16="http://schemas.microsoft.com/office/drawing/2014/main" id="{DE56C1DE-619F-48AD-BFCF-A687CEE6C17B}"/>
               </a:ext>
             </a:extLst>
           </p:cNvPr>
@@ -12398,7 +12598,7 @@
           <p:cNvPr id="13" name="">
             <a:extLst xmlns:a="http://schemas.openxmlformats.org/drawingml/2006/main">
               <a:ext uri="{FF2B5EF4-FFF2-40B4-BE49-F238E27FC236}">
-                <a16:creationId xmlns:a16="http://schemas.microsoft.com/office/drawing/2014/main" id="{27C7582A-4CEC-4992-B56C-57D012C5D749}"/>
+                <a16:creationId xmlns:a16="http://schemas.microsoft.com/office/drawing/2014/main" id="{A5F3E856-4AD8-41B8-98FA-8A1C384BE39B}"/>
               </a:ext>
             </a:extLst>
           </p:cNvPr>
@@ -12455,7 +12655,7 @@
           <p:cNvPr id="14" name="">
             <a:extLst xmlns:a="http://schemas.openxmlformats.org/drawingml/2006/main">
               <a:ext uri="{FF2B5EF4-FFF2-40B4-BE49-F238E27FC236}">
-                <a16:creationId xmlns:a16="http://schemas.microsoft.com/office/drawing/2014/main" id="{DFA42967-3EE2-42C4-87DB-A3557B2EAF5E}"/>
+                <a16:creationId xmlns:a16="http://schemas.microsoft.com/office/drawing/2014/main" id="{B6588A8B-D490-4B07-B341-D913F9DFE186}"/>
               </a:ext>
             </a:extLst>
           </p:cNvPr>
@@ -12489,7 +12689,7 @@
           <p:cNvPr id="15" name="">
             <a:extLst xmlns:a="http://schemas.openxmlformats.org/drawingml/2006/main">
               <a:ext uri="{FF2B5EF4-FFF2-40B4-BE49-F238E27FC236}">
-                <a16:creationId xmlns:a16="http://schemas.microsoft.com/office/drawing/2014/main" id="{0A8ADAD1-8E5D-475E-84E7-E2D977FE0257}"/>
+                <a16:creationId xmlns:a16="http://schemas.microsoft.com/office/drawing/2014/main" id="{458ADABA-EF8A-4B74-A7B7-81CD89B268E7}"/>
               </a:ext>
             </a:extLst>
           </p:cNvPr>
@@ -12521,7 +12721,7 @@
           <p:cNvPr id="16" name="">
             <a:extLst xmlns:a="http://schemas.openxmlformats.org/drawingml/2006/main">
               <a:ext uri="{FF2B5EF4-FFF2-40B4-BE49-F238E27FC236}">
-                <a16:creationId xmlns:a16="http://schemas.microsoft.com/office/drawing/2014/main" id="{7EE2977A-94E7-4C0A-B0A0-978EDEBFD1C3}"/>
+                <a16:creationId xmlns:a16="http://schemas.microsoft.com/office/drawing/2014/main" id="{10A4C72E-CF6C-4247-BA69-55DEC97EDBD9}"/>
               </a:ext>
             </a:extLst>
           </p:cNvPr>
@@ -12578,7 +12778,7 @@
           <p:cNvPr id="17" name="">
             <a:extLst xmlns:a="http://schemas.openxmlformats.org/drawingml/2006/main">
               <a:ext uri="{FF2B5EF4-FFF2-40B4-BE49-F238E27FC236}">
-                <a16:creationId xmlns:a16="http://schemas.microsoft.com/office/drawing/2014/main" id="{FE8C7DCA-2BE2-46A7-AF0B-CAA782A20BDB}"/>
+                <a16:creationId xmlns:a16="http://schemas.microsoft.com/office/drawing/2014/main" id="{D64E9CA2-C073-4F1B-A6B8-1D5CA2A50F8E}"/>
               </a:ext>
             </a:extLst>
           </p:cNvPr>
@@ -12635,7 +12835,7 @@
           <p:cNvPr id="18" name="">
             <a:extLst xmlns:a="http://schemas.openxmlformats.org/drawingml/2006/main">
               <a:ext uri="{FF2B5EF4-FFF2-40B4-BE49-F238E27FC236}">
-                <a16:creationId xmlns:a16="http://schemas.microsoft.com/office/drawing/2014/main" id="{B069267A-8EB6-4B6B-994B-36289B725D02}"/>
+                <a16:creationId xmlns:a16="http://schemas.microsoft.com/office/drawing/2014/main" id="{C0866AA9-659F-4CD1-9E5A-17B1A8F55AEF}"/>
               </a:ext>
             </a:extLst>
           </p:cNvPr>
@@ -12669,7 +12869,7 @@
           <p:cNvPr id="19" name="">
             <a:extLst xmlns:a="http://schemas.openxmlformats.org/drawingml/2006/main">
               <a:ext uri="{FF2B5EF4-FFF2-40B4-BE49-F238E27FC236}">
-                <a16:creationId xmlns:a16="http://schemas.microsoft.com/office/drawing/2014/main" id="{DF5308E4-3174-4A66-A8EC-191D1BDC3A1D}"/>
+                <a16:creationId xmlns:a16="http://schemas.microsoft.com/office/drawing/2014/main" id="{D27F475F-55D0-42AA-B7D5-521948E44CE3}"/>
               </a:ext>
             </a:extLst>
           </p:cNvPr>
@@ -12701,7 +12901,7 @@
           <p:cNvPr id="20" name="">
             <a:extLst xmlns:a="http://schemas.openxmlformats.org/drawingml/2006/main">
               <a:ext uri="{FF2B5EF4-FFF2-40B4-BE49-F238E27FC236}">
-                <a16:creationId xmlns:a16="http://schemas.microsoft.com/office/drawing/2014/main" id="{AF46BEF0-F58A-4D71-9F2A-4422FADD3E45}"/>
+                <a16:creationId xmlns:a16="http://schemas.microsoft.com/office/drawing/2014/main" id="{464A4E0F-A856-4C5C-8841-E62A55BBB8ED}"/>
               </a:ext>
             </a:extLst>
           </p:cNvPr>
@@ -12758,7 +12958,7 @@
           <p:cNvPr id="21" name="">
             <a:extLst xmlns:a="http://schemas.openxmlformats.org/drawingml/2006/main">
               <a:ext uri="{FF2B5EF4-FFF2-40B4-BE49-F238E27FC236}">
-                <a16:creationId xmlns:a16="http://schemas.microsoft.com/office/drawing/2014/main" id="{ADAA07A0-ADCE-4696-B24E-7B32C68CB005}"/>
+                <a16:creationId xmlns:a16="http://schemas.microsoft.com/office/drawing/2014/main" id="{A9EDB4A3-FBA2-4E36-B42E-13D6663C91F5}"/>
               </a:ext>
             </a:extLst>
           </p:cNvPr>
@@ -12815,7 +13015,7 @@
           <p:cNvPr id="22" name="">
             <a:extLst xmlns:a="http://schemas.openxmlformats.org/drawingml/2006/main">
               <a:ext uri="{FF2B5EF4-FFF2-40B4-BE49-F238E27FC236}">
-                <a16:creationId xmlns:a16="http://schemas.microsoft.com/office/drawing/2014/main" id="{FE768735-ED22-496B-BDB0-A47052484EB0}"/>
+                <a16:creationId xmlns:a16="http://schemas.microsoft.com/office/drawing/2014/main" id="{E0848909-4E49-4523-B39B-6D7C4A3B0E78}"/>
               </a:ext>
             </a:extLst>
           </p:cNvPr>
@@ -12870,7 +13070,7 @@
     </p:spTree>
     <p:extLst>
       <p:ext uri="{BB962C8B-B14F-4D97-AF65-F5344CB8AC3E}">
-        <p14:creationId xmlns:p14="http://schemas.microsoft.com/office/powerpoint/2010/main" val="1455857563"/>
+        <p14:creationId xmlns:p14="http://schemas.microsoft.com/office/powerpoint/2010/main" val="1486646483"/>
       </p:ext>
     </p:extLst>
   </p:cSld>
@@ -13071,7 +13271,7 @@
           <p:cNvPr id="22" name="">
             <a:extLst xmlns:a="http://schemas.openxmlformats.org/drawingml/2006/main">
               <a:ext uri="{FF2B5EF4-FFF2-40B4-BE49-F238E27FC236}">
-                <a16:creationId xmlns:a16="http://schemas.microsoft.com/office/drawing/2014/main" id="{0FD2F314-4BB9-4FBC-8909-F36657738B0B}"/>
+                <a16:creationId xmlns:a16="http://schemas.microsoft.com/office/drawing/2014/main" id="{0A5DD64F-CC36-4C59-A690-78994C670B03}"/>
               </a:ext>
             </a:extLst>
           </p:cNvPr>
@@ -13103,7 +13303,7 @@
           <p:cNvPr id="2" name="">
             <a:extLst xmlns:a="http://schemas.openxmlformats.org/drawingml/2006/main">
               <a:ext uri="{FF2B5EF4-FFF2-40B4-BE49-F238E27FC236}">
-                <a16:creationId xmlns:a16="http://schemas.microsoft.com/office/drawing/2014/main" id="{4E0930B3-6EA9-4508-AA87-DC01264400BE}"/>
+                <a16:creationId xmlns:a16="http://schemas.microsoft.com/office/drawing/2014/main" id="{42A144B9-AD4E-4EA2-AB85-858DA8875021}"/>
               </a:ext>
             </a:extLst>
           </p:cNvPr>
@@ -13160,7 +13360,7 @@
           <p:cNvPr id="3" name="">
             <a:extLst xmlns:a="http://schemas.openxmlformats.org/drawingml/2006/main">
               <a:ext uri="{FF2B5EF4-FFF2-40B4-BE49-F238E27FC236}">
-                <a16:creationId xmlns:a16="http://schemas.microsoft.com/office/drawing/2014/main" id="{2E91A912-43C7-402B-AEA3-58DEE576A4C3}"/>
+                <a16:creationId xmlns:a16="http://schemas.microsoft.com/office/drawing/2014/main" id="{258129A9-83C8-46D5-B15D-846D5498DA63}"/>
               </a:ext>
             </a:extLst>
           </p:cNvPr>
@@ -13192,7 +13392,7 @@
           <p:cNvPr id="4" name="">
             <a:extLst xmlns:a="http://schemas.openxmlformats.org/drawingml/2006/main">
               <a:ext uri="{FF2B5EF4-FFF2-40B4-BE49-F238E27FC236}">
-                <a16:creationId xmlns:a16="http://schemas.microsoft.com/office/drawing/2014/main" id="{17A8DE40-E83E-4CA3-AF69-AF41AF0766AF}"/>
+                <a16:creationId xmlns:a16="http://schemas.microsoft.com/office/drawing/2014/main" id="{EF209453-CADF-414F-8909-A67542C8CD81}"/>
               </a:ext>
             </a:extLst>
           </p:cNvPr>
@@ -13249,7 +13449,7 @@
           <p:cNvPr id="5" name="">
             <a:extLst xmlns:a="http://schemas.openxmlformats.org/drawingml/2006/main">
               <a:ext uri="{FF2B5EF4-FFF2-40B4-BE49-F238E27FC236}">
-                <a16:creationId xmlns:a16="http://schemas.microsoft.com/office/drawing/2014/main" id="{776F5961-F3BB-43CC-A4F9-82A6DDB24D36}"/>
+                <a16:creationId xmlns:a16="http://schemas.microsoft.com/office/drawing/2014/main" id="{6D14F7A0-1ABE-419F-AA4E-DB7900BD99E2}"/>
               </a:ext>
             </a:extLst>
           </p:cNvPr>
@@ -13306,7 +13506,7 @@
           <p:cNvPr id="6" name="">
             <a:extLst xmlns:a="http://schemas.openxmlformats.org/drawingml/2006/main">
               <a:ext uri="{FF2B5EF4-FFF2-40B4-BE49-F238E27FC236}">
-                <a16:creationId xmlns:a16="http://schemas.microsoft.com/office/drawing/2014/main" id="{1776C979-90E3-4BFA-82E4-E192F32F260A}"/>
+                <a16:creationId xmlns:a16="http://schemas.microsoft.com/office/drawing/2014/main" id="{F2B2FE1E-8437-4E65-B5F6-9E8156AC7510}"/>
               </a:ext>
             </a:extLst>
           </p:cNvPr>
@@ -13363,7 +13563,7 @@
           <p:cNvPr id="7" name="">
             <a:extLst xmlns:a="http://schemas.openxmlformats.org/drawingml/2006/main">
               <a:ext uri="{FF2B5EF4-FFF2-40B4-BE49-F238E27FC236}">
-                <a16:creationId xmlns:a16="http://schemas.microsoft.com/office/drawing/2014/main" id="{CACFA90C-5F16-4AED-B5B0-377723BE3754}"/>
+                <a16:creationId xmlns:a16="http://schemas.microsoft.com/office/drawing/2014/main" id="{45575EAB-F69A-493D-B912-5EE0AAD12B69}"/>
               </a:ext>
             </a:extLst>
           </p:cNvPr>
@@ -13395,7 +13595,7 @@
           <p:cNvPr id="8" name="">
             <a:extLst xmlns:a="http://schemas.openxmlformats.org/drawingml/2006/main">
               <a:ext uri="{FF2B5EF4-FFF2-40B4-BE49-F238E27FC236}">
-                <a16:creationId xmlns:a16="http://schemas.microsoft.com/office/drawing/2014/main" id="{3480739C-6E21-4EFA-8FC1-75E8DC2E9C43}"/>
+                <a16:creationId xmlns:a16="http://schemas.microsoft.com/office/drawing/2014/main" id="{C61AC900-E51B-49D5-B3E5-7476826E5D77}"/>
               </a:ext>
             </a:extLst>
           </p:cNvPr>
@@ -13452,7 +13652,7 @@
           <p:cNvPr id="9" name="">
             <a:extLst xmlns:a="http://schemas.openxmlformats.org/drawingml/2006/main">
               <a:ext uri="{FF2B5EF4-FFF2-40B4-BE49-F238E27FC236}">
-                <a16:creationId xmlns:a16="http://schemas.microsoft.com/office/drawing/2014/main" id="{810B3729-6CE7-4CF9-B515-82EEF1BA62A5}"/>
+                <a16:creationId xmlns:a16="http://schemas.microsoft.com/office/drawing/2014/main" id="{A89E317D-5AA4-4383-B03D-3D7CE64D9BE5}"/>
               </a:ext>
             </a:extLst>
           </p:cNvPr>
@@ -13509,7 +13709,7 @@
           <p:cNvPr id="10" name="">
             <a:extLst xmlns:a="http://schemas.openxmlformats.org/drawingml/2006/main">
               <a:ext uri="{FF2B5EF4-FFF2-40B4-BE49-F238E27FC236}">
-                <a16:creationId xmlns:a16="http://schemas.microsoft.com/office/drawing/2014/main" id="{98372E9F-7B71-427D-A0AD-3D07A0437D0A}"/>
+                <a16:creationId xmlns:a16="http://schemas.microsoft.com/office/drawing/2014/main" id="{F26EBD90-D9B9-4BD5-8A67-FE26C840D08B}"/>
               </a:ext>
             </a:extLst>
           </p:cNvPr>
@@ -13543,7 +13743,7 @@
           <p:cNvPr id="11" name="">
             <a:extLst xmlns:a="http://schemas.openxmlformats.org/drawingml/2006/main">
               <a:ext uri="{FF2B5EF4-FFF2-40B4-BE49-F238E27FC236}">
-                <a16:creationId xmlns:a16="http://schemas.microsoft.com/office/drawing/2014/main" id="{A1E57573-78BC-4C1D-BC2D-26F0D37C064B}"/>
+                <a16:creationId xmlns:a16="http://schemas.microsoft.com/office/drawing/2014/main" id="{753AE0CA-6F52-4AD6-B604-91516537CD60}"/>
               </a:ext>
             </a:extLst>
           </p:cNvPr>
@@ -13575,7 +13775,7 @@
           <p:cNvPr id="12" name="">
             <a:extLst xmlns:a="http://schemas.openxmlformats.org/drawingml/2006/main">
               <a:ext uri="{FF2B5EF4-FFF2-40B4-BE49-F238E27FC236}">
-                <a16:creationId xmlns:a16="http://schemas.microsoft.com/office/drawing/2014/main" id="{F1238961-DF3D-47D5-B045-4E74EAA04B80}"/>
+                <a16:creationId xmlns:a16="http://schemas.microsoft.com/office/drawing/2014/main" id="{62849CD3-6EEE-4635-87AC-13B975A61246}"/>
               </a:ext>
             </a:extLst>
           </p:cNvPr>
@@ -13632,7 +13832,7 @@
           <p:cNvPr id="13" name="">
             <a:extLst xmlns:a="http://schemas.openxmlformats.org/drawingml/2006/main">
               <a:ext uri="{FF2B5EF4-FFF2-40B4-BE49-F238E27FC236}">
-                <a16:creationId xmlns:a16="http://schemas.microsoft.com/office/drawing/2014/main" id="{DEED7543-A17B-4B3F-A7C7-74FE557EE873}"/>
+                <a16:creationId xmlns:a16="http://schemas.microsoft.com/office/drawing/2014/main" id="{50874FE4-F189-4345-9537-F744F0B90AE5}"/>
               </a:ext>
             </a:extLst>
           </p:cNvPr>
@@ -13689,7 +13889,7 @@
           <p:cNvPr id="14" name="">
             <a:extLst xmlns:a="http://schemas.openxmlformats.org/drawingml/2006/main">
               <a:ext uri="{FF2B5EF4-FFF2-40B4-BE49-F238E27FC236}">
-                <a16:creationId xmlns:a16="http://schemas.microsoft.com/office/drawing/2014/main" id="{317A3BC4-24A3-40FF-A24A-F25158F37ADF}"/>
+                <a16:creationId xmlns:a16="http://schemas.microsoft.com/office/drawing/2014/main" id="{22D9A66F-1A86-4F6F-A914-5A19D416E3AB}"/>
               </a:ext>
             </a:extLst>
           </p:cNvPr>
@@ -13723,7 +13923,7 @@
           <p:cNvPr id="15" name="">
             <a:extLst xmlns:a="http://schemas.openxmlformats.org/drawingml/2006/main">
               <a:ext uri="{FF2B5EF4-FFF2-40B4-BE49-F238E27FC236}">
-                <a16:creationId xmlns:a16="http://schemas.microsoft.com/office/drawing/2014/main" id="{1235B6FC-78B4-4789-8808-662B7D2AEAAF}"/>
+                <a16:creationId xmlns:a16="http://schemas.microsoft.com/office/drawing/2014/main" id="{400016D7-8E7E-4A24-92C1-97BA2807B767}"/>
               </a:ext>
             </a:extLst>
           </p:cNvPr>
@@ -13755,7 +13955,7 @@
           <p:cNvPr id="16" name="">
             <a:extLst xmlns:a="http://schemas.openxmlformats.org/drawingml/2006/main">
               <a:ext uri="{FF2B5EF4-FFF2-40B4-BE49-F238E27FC236}">
-                <a16:creationId xmlns:a16="http://schemas.microsoft.com/office/drawing/2014/main" id="{B51AB926-75B9-430D-ACF7-96D543F99F70}"/>
+                <a16:creationId xmlns:a16="http://schemas.microsoft.com/office/drawing/2014/main" id="{3F73E412-128F-4FB0-A763-1B4277EAAF99}"/>
               </a:ext>
             </a:extLst>
           </p:cNvPr>
@@ -13812,7 +14012,7 @@
           <p:cNvPr id="17" name="">
             <a:extLst xmlns:a="http://schemas.openxmlformats.org/drawingml/2006/main">
               <a:ext uri="{FF2B5EF4-FFF2-40B4-BE49-F238E27FC236}">
-                <a16:creationId xmlns:a16="http://schemas.microsoft.com/office/drawing/2014/main" id="{0B6AF56B-9A39-4863-B266-016756B05F5B}"/>
+                <a16:creationId xmlns:a16="http://schemas.microsoft.com/office/drawing/2014/main" id="{F4950545-7C73-4B03-83BE-955BE2BBD452}"/>
               </a:ext>
             </a:extLst>
           </p:cNvPr>
@@ -13869,7 +14069,7 @@
           <p:cNvPr id="18" name="">
             <a:extLst xmlns:a="http://schemas.openxmlformats.org/drawingml/2006/main">
               <a:ext uri="{FF2B5EF4-FFF2-40B4-BE49-F238E27FC236}">
-                <a16:creationId xmlns:a16="http://schemas.microsoft.com/office/drawing/2014/main" id="{05A07134-A501-4F12-A8D3-F7AF60F1A8D5}"/>
+                <a16:creationId xmlns:a16="http://schemas.microsoft.com/office/drawing/2014/main" id="{315EFEF9-55FF-4D15-BDA4-6C634E4A1B9E}"/>
               </a:ext>
             </a:extLst>
           </p:cNvPr>
@@ -13903,7 +14103,7 @@
           <p:cNvPr id="19" name="">
             <a:extLst xmlns:a="http://schemas.openxmlformats.org/drawingml/2006/main">
               <a:ext uri="{FF2B5EF4-FFF2-40B4-BE49-F238E27FC236}">
-                <a16:creationId xmlns:a16="http://schemas.microsoft.com/office/drawing/2014/main" id="{C4E2B765-EA03-408B-8B44-165D9A37C25E}"/>
+                <a16:creationId xmlns:a16="http://schemas.microsoft.com/office/drawing/2014/main" id="{B0E62469-F055-4FAB-B26E-7CCDEAA18082}"/>
               </a:ext>
             </a:extLst>
           </p:cNvPr>
@@ -13935,7 +14135,7 @@
           <p:cNvPr id="20" name="">
             <a:extLst xmlns:a="http://schemas.openxmlformats.org/drawingml/2006/main">
               <a:ext uri="{FF2B5EF4-FFF2-40B4-BE49-F238E27FC236}">
-                <a16:creationId xmlns:a16="http://schemas.microsoft.com/office/drawing/2014/main" id="{EA5D02E9-B74B-403A-A1DE-2F521F949A62}"/>
+                <a16:creationId xmlns:a16="http://schemas.microsoft.com/office/drawing/2014/main" id="{0C839F1B-31AB-44C8-ACAB-1FA57BFA7F5B}"/>
               </a:ext>
             </a:extLst>
           </p:cNvPr>
@@ -13992,7 +14192,7 @@
           <p:cNvPr id="21" name="">
             <a:extLst xmlns:a="http://schemas.openxmlformats.org/drawingml/2006/main">
               <a:ext uri="{FF2B5EF4-FFF2-40B4-BE49-F238E27FC236}">
-                <a16:creationId xmlns:a16="http://schemas.microsoft.com/office/drawing/2014/main" id="{04FD267F-4198-4E36-B78A-2EE54616218D}"/>
+                <a16:creationId xmlns:a16="http://schemas.microsoft.com/office/drawing/2014/main" id="{0B55054D-9ACB-423E-8607-2F13FCE5A7D3}"/>
               </a:ext>
             </a:extLst>
           </p:cNvPr>
@@ -14047,7 +14247,7 @@
     </p:spTree>
     <p:extLst>
       <p:ext uri="{BB962C8B-B14F-4D97-AF65-F5344CB8AC3E}">
-        <p14:creationId xmlns:p14="http://schemas.microsoft.com/office/powerpoint/2010/main" val="1355423803"/>
+        <p14:creationId xmlns:p14="http://schemas.microsoft.com/office/powerpoint/2010/main" val="526897233"/>
       </p:ext>
     </p:extLst>
   </p:cSld>
